--- a/Mapped Curriculum Lessons/Grade 7/Lesson 15 - Joining Text/Joining Text - Slides.pptx
+++ b/Mapped Curriculum Lessons/Grade 7/Lesson 15 - Joining Text/Joining Text - Slides.pptx
@@ -2,28 +2,28 @@
 <file path=ppt/presentation.xml><?xml version="1.0" encoding="utf-8"?>
 <p:presentation xmlns:p="http://schemas.openxmlformats.org/presentationml/2006/main" embedTrueTypeFonts="1" saveSubsetFonts="0">
   <p:sldMasterIdLst>
-    <p:sldMasterId xmlns:r="http://schemas.openxmlformats.org/officeDocument/2006/relationships" id="2147483648" r:id="R6387465b4bb5497b"/>
+    <p:sldMasterId xmlns:r="http://schemas.openxmlformats.org/officeDocument/2006/relationships" id="2147483648" r:id="Rfeeeadee43174065"/>
   </p:sldMasterIdLst>
   <p:notesMasterIdLst>
-    <p:notesMasterId xmlns:r="http://schemas.openxmlformats.org/officeDocument/2006/relationships" r:id="R18601a2c75964dae"/>
+    <p:notesMasterId xmlns:r="http://schemas.openxmlformats.org/officeDocument/2006/relationships" r:id="R87e836991396450d"/>
   </p:notesMasterIdLst>
   <p:sldIdLst>
-    <p:sldId xmlns:r="http://schemas.openxmlformats.org/officeDocument/2006/relationships" id="256" r:id="R84a5ab21c2804a46"/>
-    <p:sldId xmlns:r="http://schemas.openxmlformats.org/officeDocument/2006/relationships" id="257" r:id="Rf920f2b97bf94027"/>
-    <p:sldId xmlns:r="http://schemas.openxmlformats.org/officeDocument/2006/relationships" id="258" r:id="R2e72f3c9233441ef"/>
-    <p:sldId xmlns:r="http://schemas.openxmlformats.org/officeDocument/2006/relationships" id="259" r:id="Rfc89abe08b8a45c0"/>
-    <p:sldId xmlns:r="http://schemas.openxmlformats.org/officeDocument/2006/relationships" id="260" r:id="R22ce8ad821db4856"/>
-    <p:sldId xmlns:r="http://schemas.openxmlformats.org/officeDocument/2006/relationships" id="261" r:id="R83f8ceb34d424e63"/>
-    <p:sldId xmlns:r="http://schemas.openxmlformats.org/officeDocument/2006/relationships" id="262" r:id="R40c3068cd4b14eaa"/>
-    <p:sldId xmlns:r="http://schemas.openxmlformats.org/officeDocument/2006/relationships" id="263" r:id="R6d255b70eba14ba8"/>
-    <p:sldId xmlns:r="http://schemas.openxmlformats.org/officeDocument/2006/relationships" id="264" r:id="Rd2a037c881f34394"/>
+    <p:sldId xmlns:r="http://schemas.openxmlformats.org/officeDocument/2006/relationships" id="256" r:id="R3442da6638b24c68"/>
+    <p:sldId xmlns:r="http://schemas.openxmlformats.org/officeDocument/2006/relationships" id="257" r:id="R8f1d2ceb421d4174"/>
+    <p:sldId xmlns:r="http://schemas.openxmlformats.org/officeDocument/2006/relationships" id="258" r:id="R1903991f12914264"/>
+    <p:sldId xmlns:r="http://schemas.openxmlformats.org/officeDocument/2006/relationships" id="259" r:id="Rddb9ee7610434c74"/>
+    <p:sldId xmlns:r="http://schemas.openxmlformats.org/officeDocument/2006/relationships" id="260" r:id="R41c07db981ad489b"/>
+    <p:sldId xmlns:r="http://schemas.openxmlformats.org/officeDocument/2006/relationships" id="261" r:id="R1c9de452fc92480d"/>
+    <p:sldId xmlns:r="http://schemas.openxmlformats.org/officeDocument/2006/relationships" id="262" r:id="R8d15b7d387394453"/>
+    <p:sldId xmlns:r="http://schemas.openxmlformats.org/officeDocument/2006/relationships" id="263" r:id="Ra9ada9dc0ed840c6"/>
+    <p:sldId xmlns:r="http://schemas.openxmlformats.org/officeDocument/2006/relationships" id="264" r:id="R48940afb0fb04138"/>
   </p:sldIdLst>
   <p:sldSz cx="12192000" cy="6858000"/>
   <p:notesSz cx="6858000" cy="9144000"/>
   <p:embeddedFontLst>
     <p:embeddedFont>
       <p:font typeface="JetBrains Mono"/>
-      <p:regular xmlns:r="http://schemas.openxmlformats.org/officeDocument/2006/relationships" r:id="R3441a03af4df4ee1"/>
+      <p:regular xmlns:r="http://schemas.openxmlformats.org/officeDocument/2006/relationships" r:id="R2b063fe9b2764d1c"/>
     </p:embeddedFont>
   </p:embeddedFontLst>
 </p:presentation>
@@ -1071,7 +1071,7 @@
           <p:nvPr/>
         </p:nvPicPr>
         <p:blipFill rotWithShape="1">
-          <a:blip xmlns:r="http://schemas.openxmlformats.org/officeDocument/2006/relationships" xmlns:a="http://schemas.openxmlformats.org/drawingml/2006/main" r:embed="R943d451e534346e4"/>
+          <a:blip xmlns:r="http://schemas.openxmlformats.org/officeDocument/2006/relationships" xmlns:a="http://schemas.openxmlformats.org/drawingml/2006/main" r:embed="R488139b19a494760"/>
           <a:stretch xmlns:a="http://schemas.openxmlformats.org/drawingml/2006/main"/>
         </p:blipFill>
         <p:spPr>
@@ -1451,7 +1451,7 @@
           <p:nvPr/>
         </p:nvPicPr>
         <p:blipFill rotWithShape="1">
-          <a:blip xmlns:r="http://schemas.openxmlformats.org/officeDocument/2006/relationships" xmlns:a="http://schemas.openxmlformats.org/drawingml/2006/main" r:embed="R491815724b7141ab">
+          <a:blip xmlns:r="http://schemas.openxmlformats.org/officeDocument/2006/relationships" xmlns:a="http://schemas.openxmlformats.org/drawingml/2006/main" r:embed="R620223b247864b2f">
             <a:alphaModFix amt="28000"/>
           </a:blip>
           <a:stretch xmlns:a="http://schemas.openxmlformats.org/drawingml/2006/main"/>
@@ -1664,7 +1664,7 @@
           <p:nvPr/>
         </p:nvPicPr>
         <p:blipFill rotWithShape="1">
-          <a:blip xmlns:r="http://schemas.openxmlformats.org/officeDocument/2006/relationships" xmlns:a="http://schemas.openxmlformats.org/drawingml/2006/main" r:embed="R0d12d2dd454b4158">
+          <a:blip xmlns:r="http://schemas.openxmlformats.org/officeDocument/2006/relationships" xmlns:a="http://schemas.openxmlformats.org/drawingml/2006/main" r:embed="R59faf71b51ad41fa">
             <a:alphaModFix amt="28000"/>
           </a:blip>
           <a:stretch xmlns:a="http://schemas.openxmlformats.org/drawingml/2006/main"/>
@@ -1899,7 +1899,7 @@
           <p:nvPr/>
         </p:nvPicPr>
         <p:blipFill rotWithShape="1">
-          <a:blip xmlns:r="http://schemas.openxmlformats.org/officeDocument/2006/relationships" xmlns:a="http://schemas.openxmlformats.org/drawingml/2006/main" r:embed="R6fba8d4d51fe475e">
+          <a:blip xmlns:r="http://schemas.openxmlformats.org/officeDocument/2006/relationships" xmlns:a="http://schemas.openxmlformats.org/drawingml/2006/main" r:embed="R423f395463b74b54">
             <a:alphaModFix amt="28000"/>
           </a:blip>
           <a:stretch xmlns:a="http://schemas.openxmlformats.org/drawingml/2006/main"/>
@@ -2176,7 +2176,7 @@
           <p:nvPr/>
         </p:nvPicPr>
         <p:blipFill rotWithShape="1">
-          <a:blip xmlns:r="http://schemas.openxmlformats.org/officeDocument/2006/relationships" xmlns:a="http://schemas.openxmlformats.org/drawingml/2006/main" r:embed="Ra993dd18e3794629">
+          <a:blip xmlns:r="http://schemas.openxmlformats.org/officeDocument/2006/relationships" xmlns:a="http://schemas.openxmlformats.org/drawingml/2006/main" r:embed="R8143138356f940ef">
             <a:alphaModFix amt="28000"/>
           </a:blip>
           <a:stretch xmlns:a="http://schemas.openxmlformats.org/drawingml/2006/main"/>
@@ -2451,7 +2451,7 @@
           <p:nvPr/>
         </p:nvPicPr>
         <p:blipFill rotWithShape="1">
-          <a:blip xmlns:r="http://schemas.openxmlformats.org/officeDocument/2006/relationships" xmlns:a="http://schemas.openxmlformats.org/drawingml/2006/main" r:embed="R03874c26bdfc4a91">
+          <a:blip xmlns:r="http://schemas.openxmlformats.org/officeDocument/2006/relationships" xmlns:a="http://schemas.openxmlformats.org/drawingml/2006/main" r:embed="R4d98e164a83e4578">
             <a:alphaModFix amt="28000"/>
           </a:blip>
           <a:stretch xmlns:a="http://schemas.openxmlformats.org/drawingml/2006/main"/>
@@ -2875,7 +2875,7 @@
           <p:nvPr/>
         </p:nvPicPr>
         <p:blipFill rotWithShape="1">
-          <a:blip xmlns:r="http://schemas.openxmlformats.org/officeDocument/2006/relationships" xmlns:a="http://schemas.openxmlformats.org/drawingml/2006/main" r:embed="R900c09a654504fbc">
+          <a:blip xmlns:r="http://schemas.openxmlformats.org/officeDocument/2006/relationships" xmlns:a="http://schemas.openxmlformats.org/drawingml/2006/main" r:embed="R6b22d46ec2db48a7">
             <a:alphaModFix amt="28000"/>
           </a:blip>
           <a:stretch xmlns:a="http://schemas.openxmlformats.org/drawingml/2006/main"/>
@@ -3016,7 +3016,7 @@
           <p:nvPr/>
         </p:nvPicPr>
         <p:blipFill rotWithShape="1">
-          <a:blip xmlns:r="http://schemas.openxmlformats.org/officeDocument/2006/relationships" xmlns:a="http://schemas.openxmlformats.org/drawingml/2006/main" r:embed="R2065134f9ccd4fa2">
+          <a:blip xmlns:r="http://schemas.openxmlformats.org/officeDocument/2006/relationships" xmlns:a="http://schemas.openxmlformats.org/drawingml/2006/main" r:embed="R76a735c8fa584463">
             <a:alphaModFix amt="28000"/>
           </a:blip>
           <a:stretch xmlns:a="http://schemas.openxmlformats.org/drawingml/2006/main"/>
@@ -3130,7 +3130,7 @@
           <p:nvPr/>
         </p:nvPicPr>
         <p:blipFill rotWithShape="1">
-          <a:blip xmlns:r="http://schemas.openxmlformats.org/officeDocument/2006/relationships" xmlns:a="http://schemas.openxmlformats.org/drawingml/2006/main" r:embed="R31574798ca2940fb">
+          <a:blip xmlns:r="http://schemas.openxmlformats.org/officeDocument/2006/relationships" xmlns:a="http://schemas.openxmlformats.org/drawingml/2006/main" r:embed="Rc46597edb8624e89">
             <a:alphaModFix amt="28000"/>
           </a:blip>
           <a:stretch xmlns:a="http://schemas.openxmlformats.org/drawingml/2006/main"/>
@@ -3457,7 +3457,7 @@
           <p:nvPr/>
         </p:nvPicPr>
         <p:blipFill rotWithShape="1">
-          <a:blip xmlns:r="http://schemas.openxmlformats.org/officeDocument/2006/relationships" xmlns:a="http://schemas.openxmlformats.org/drawingml/2006/main" r:embed="R54e9bdfa2c9043e6">
+          <a:blip xmlns:r="http://schemas.openxmlformats.org/officeDocument/2006/relationships" xmlns:a="http://schemas.openxmlformats.org/drawingml/2006/main" r:embed="R67f88f70189d4034">
             <a:alphaModFix amt="28000"/>
           </a:blip>
           <a:stretch xmlns:a="http://schemas.openxmlformats.org/drawingml/2006/main"/>
@@ -3745,7 +3745,7 @@
           <p:nvPr/>
         </p:nvPicPr>
         <p:blipFill rotWithShape="1">
-          <a:blip xmlns:r="http://schemas.openxmlformats.org/officeDocument/2006/relationships" xmlns:a="http://schemas.openxmlformats.org/drawingml/2006/main" r:embed="R40b951578cab4cb7">
+          <a:blip xmlns:r="http://schemas.openxmlformats.org/officeDocument/2006/relationships" xmlns:a="http://schemas.openxmlformats.org/drawingml/2006/main" r:embed="Re120e08c33024ade">
             <a:alphaModFix amt="28000"/>
           </a:blip>
           <a:stretch xmlns:a="http://schemas.openxmlformats.org/drawingml/2006/main"/>
@@ -3982,17 +3982,17 @@
   </p:cSld>
   <p:clrMap bg1="lt1" tx1="dk1" bg2="lt2" tx2="dk2" accent1="accent1" accent2="accent2" accent3="accent3" accent4="accent4" accent5="accent5" accent6="accent6" hlink="hlink" folHlink="folHlink"/>
   <p:sldLayoutIdLst>
-    <p:sldLayoutId xmlns:r="http://schemas.openxmlformats.org/officeDocument/2006/relationships" id="2147483649" r:id="R6c5bed49657f49d3"/>
-    <p:sldLayoutId xmlns:r="http://schemas.openxmlformats.org/officeDocument/2006/relationships" id="2147483650" r:id="R3609195aaf2046cd"/>
-    <p:sldLayoutId xmlns:r="http://schemas.openxmlformats.org/officeDocument/2006/relationships" id="2147483651" r:id="R1b438cb4647a4311"/>
-    <p:sldLayoutId xmlns:r="http://schemas.openxmlformats.org/officeDocument/2006/relationships" id="2147483652" r:id="R5a967c9eb56a45bd"/>
-    <p:sldLayoutId xmlns:r="http://schemas.openxmlformats.org/officeDocument/2006/relationships" id="2147483653" r:id="R1b27a6e51cda44f3"/>
-    <p:sldLayoutId xmlns:r="http://schemas.openxmlformats.org/officeDocument/2006/relationships" id="2147483654" r:id="R56240b4779e64e9a"/>
-    <p:sldLayoutId xmlns:r="http://schemas.openxmlformats.org/officeDocument/2006/relationships" id="2147483655" r:id="Rbd0bb198205d4266"/>
-    <p:sldLayoutId xmlns:r="http://schemas.openxmlformats.org/officeDocument/2006/relationships" id="2147483656" r:id="R8ba8503a485b48f5"/>
-    <p:sldLayoutId xmlns:r="http://schemas.openxmlformats.org/officeDocument/2006/relationships" id="2147483657" r:id="Rf6407b56dd05424a"/>
-    <p:sldLayoutId xmlns:r="http://schemas.openxmlformats.org/officeDocument/2006/relationships" id="2147483658" r:id="R72c16c6502c6437e"/>
-    <p:sldLayoutId xmlns:r="http://schemas.openxmlformats.org/officeDocument/2006/relationships" id="2147483659" r:id="R07cf88136c134e9b"/>
+    <p:sldLayoutId xmlns:r="http://schemas.openxmlformats.org/officeDocument/2006/relationships" id="2147483649" r:id="R1deeb9cb59744b3f"/>
+    <p:sldLayoutId xmlns:r="http://schemas.openxmlformats.org/officeDocument/2006/relationships" id="2147483650" r:id="Rf43d986062c240e8"/>
+    <p:sldLayoutId xmlns:r="http://schemas.openxmlformats.org/officeDocument/2006/relationships" id="2147483651" r:id="R297900286a9b4176"/>
+    <p:sldLayoutId xmlns:r="http://schemas.openxmlformats.org/officeDocument/2006/relationships" id="2147483652" r:id="Re89355ea198244a0"/>
+    <p:sldLayoutId xmlns:r="http://schemas.openxmlformats.org/officeDocument/2006/relationships" id="2147483653" r:id="Re8fe9476b6a64e26"/>
+    <p:sldLayoutId xmlns:r="http://schemas.openxmlformats.org/officeDocument/2006/relationships" id="2147483654" r:id="R2b731e929d5c4cc6"/>
+    <p:sldLayoutId xmlns:r="http://schemas.openxmlformats.org/officeDocument/2006/relationships" id="2147483655" r:id="R223abe1219044992"/>
+    <p:sldLayoutId xmlns:r="http://schemas.openxmlformats.org/officeDocument/2006/relationships" id="2147483656" r:id="R37c2c12922df43e2"/>
+    <p:sldLayoutId xmlns:r="http://schemas.openxmlformats.org/officeDocument/2006/relationships" id="2147483657" r:id="Ra7ebfe52e2fa451e"/>
+    <p:sldLayoutId xmlns:r="http://schemas.openxmlformats.org/officeDocument/2006/relationships" id="2147483658" r:id="R1e4db348e88b4031"/>
+    <p:sldLayoutId xmlns:r="http://schemas.openxmlformats.org/officeDocument/2006/relationships" id="2147483659" r:id="R78606980593e4efa"/>
   </p:sldLayoutIdLst>
   <p:hf hdr="0" ftr="0" dt="0"/>
   <p:txStyles>

--- a/Mapped Curriculum Lessons/Grade 7/Lesson 15 - Joining Text/Joining Text - Slides.pptx
+++ b/Mapped Curriculum Lessons/Grade 7/Lesson 15 - Joining Text/Joining Text - Slides.pptx
@@ -2,28 +2,28 @@
 <file path=ppt/presentation.xml><?xml version="1.0" encoding="utf-8"?>
 <p:presentation xmlns:p="http://schemas.openxmlformats.org/presentationml/2006/main" embedTrueTypeFonts="1" saveSubsetFonts="0">
   <p:sldMasterIdLst>
-    <p:sldMasterId xmlns:r="http://schemas.openxmlformats.org/officeDocument/2006/relationships" id="2147483648" r:id="Rfeeeadee43174065"/>
+    <p:sldMasterId xmlns:r="http://schemas.openxmlformats.org/officeDocument/2006/relationships" id="2147483648" r:id="Ra2fc2761ead14d22"/>
   </p:sldMasterIdLst>
   <p:notesMasterIdLst>
-    <p:notesMasterId xmlns:r="http://schemas.openxmlformats.org/officeDocument/2006/relationships" r:id="R87e836991396450d"/>
+    <p:notesMasterId xmlns:r="http://schemas.openxmlformats.org/officeDocument/2006/relationships" r:id="Rbb32bbe64d9c4571"/>
   </p:notesMasterIdLst>
   <p:sldIdLst>
-    <p:sldId xmlns:r="http://schemas.openxmlformats.org/officeDocument/2006/relationships" id="256" r:id="R3442da6638b24c68"/>
-    <p:sldId xmlns:r="http://schemas.openxmlformats.org/officeDocument/2006/relationships" id="257" r:id="R8f1d2ceb421d4174"/>
-    <p:sldId xmlns:r="http://schemas.openxmlformats.org/officeDocument/2006/relationships" id="258" r:id="R1903991f12914264"/>
-    <p:sldId xmlns:r="http://schemas.openxmlformats.org/officeDocument/2006/relationships" id="259" r:id="Rddb9ee7610434c74"/>
-    <p:sldId xmlns:r="http://schemas.openxmlformats.org/officeDocument/2006/relationships" id="260" r:id="R41c07db981ad489b"/>
-    <p:sldId xmlns:r="http://schemas.openxmlformats.org/officeDocument/2006/relationships" id="261" r:id="R1c9de452fc92480d"/>
-    <p:sldId xmlns:r="http://schemas.openxmlformats.org/officeDocument/2006/relationships" id="262" r:id="R8d15b7d387394453"/>
-    <p:sldId xmlns:r="http://schemas.openxmlformats.org/officeDocument/2006/relationships" id="263" r:id="Ra9ada9dc0ed840c6"/>
-    <p:sldId xmlns:r="http://schemas.openxmlformats.org/officeDocument/2006/relationships" id="264" r:id="R48940afb0fb04138"/>
+    <p:sldId xmlns:r="http://schemas.openxmlformats.org/officeDocument/2006/relationships" id="256" r:id="Rd20b0334e1004378"/>
+    <p:sldId xmlns:r="http://schemas.openxmlformats.org/officeDocument/2006/relationships" id="257" r:id="R87e26b865e004308"/>
+    <p:sldId xmlns:r="http://schemas.openxmlformats.org/officeDocument/2006/relationships" id="258" r:id="R4eea7bc783904422"/>
+    <p:sldId xmlns:r="http://schemas.openxmlformats.org/officeDocument/2006/relationships" id="259" r:id="Rf0a406e9d38141f0"/>
+    <p:sldId xmlns:r="http://schemas.openxmlformats.org/officeDocument/2006/relationships" id="260" r:id="Rc54d58e8b6304359"/>
+    <p:sldId xmlns:r="http://schemas.openxmlformats.org/officeDocument/2006/relationships" id="261" r:id="R2bc48a4528934fad"/>
+    <p:sldId xmlns:r="http://schemas.openxmlformats.org/officeDocument/2006/relationships" id="262" r:id="R6815d21db7184b86"/>
+    <p:sldId xmlns:r="http://schemas.openxmlformats.org/officeDocument/2006/relationships" id="263" r:id="R9afcc02f21074bc1"/>
+    <p:sldId xmlns:r="http://schemas.openxmlformats.org/officeDocument/2006/relationships" id="264" r:id="R3f2aa2268f51494e"/>
   </p:sldIdLst>
   <p:sldSz cx="12192000" cy="6858000"/>
   <p:notesSz cx="6858000" cy="9144000"/>
   <p:embeddedFontLst>
     <p:embeddedFont>
       <p:font typeface="JetBrains Mono"/>
-      <p:regular xmlns:r="http://schemas.openxmlformats.org/officeDocument/2006/relationships" r:id="R2b063fe9b2764d1c"/>
+      <p:regular xmlns:r="http://schemas.openxmlformats.org/officeDocument/2006/relationships" r:id="Rd252aa3520f44ea7"/>
     </p:embeddedFont>
   </p:embeddedFontLst>
 </p:presentation>
@@ -1071,7 +1071,7 @@
           <p:nvPr/>
         </p:nvPicPr>
         <p:blipFill rotWithShape="1">
-          <a:blip xmlns:r="http://schemas.openxmlformats.org/officeDocument/2006/relationships" xmlns:a="http://schemas.openxmlformats.org/drawingml/2006/main" r:embed="R488139b19a494760"/>
+          <a:blip xmlns:r="http://schemas.openxmlformats.org/officeDocument/2006/relationships" xmlns:a="http://schemas.openxmlformats.org/drawingml/2006/main" r:embed="R2963c7c392b54a04"/>
           <a:stretch xmlns:a="http://schemas.openxmlformats.org/drawingml/2006/main"/>
         </p:blipFill>
         <p:spPr>
@@ -1451,7 +1451,7 @@
           <p:nvPr/>
         </p:nvPicPr>
         <p:blipFill rotWithShape="1">
-          <a:blip xmlns:r="http://schemas.openxmlformats.org/officeDocument/2006/relationships" xmlns:a="http://schemas.openxmlformats.org/drawingml/2006/main" r:embed="R620223b247864b2f">
+          <a:blip xmlns:r="http://schemas.openxmlformats.org/officeDocument/2006/relationships" xmlns:a="http://schemas.openxmlformats.org/drawingml/2006/main" r:embed="R3252df16f36c4e27">
             <a:alphaModFix amt="28000"/>
           </a:blip>
           <a:stretch xmlns:a="http://schemas.openxmlformats.org/drawingml/2006/main"/>
@@ -1664,7 +1664,7 @@
           <p:nvPr/>
         </p:nvPicPr>
         <p:blipFill rotWithShape="1">
-          <a:blip xmlns:r="http://schemas.openxmlformats.org/officeDocument/2006/relationships" xmlns:a="http://schemas.openxmlformats.org/drawingml/2006/main" r:embed="R59faf71b51ad41fa">
+          <a:blip xmlns:r="http://schemas.openxmlformats.org/officeDocument/2006/relationships" xmlns:a="http://schemas.openxmlformats.org/drawingml/2006/main" r:embed="R4c3b980607a34040">
             <a:alphaModFix amt="28000"/>
           </a:blip>
           <a:stretch xmlns:a="http://schemas.openxmlformats.org/drawingml/2006/main"/>
@@ -1899,7 +1899,7 @@
           <p:nvPr/>
         </p:nvPicPr>
         <p:blipFill rotWithShape="1">
-          <a:blip xmlns:r="http://schemas.openxmlformats.org/officeDocument/2006/relationships" xmlns:a="http://schemas.openxmlformats.org/drawingml/2006/main" r:embed="R423f395463b74b54">
+          <a:blip xmlns:r="http://schemas.openxmlformats.org/officeDocument/2006/relationships" xmlns:a="http://schemas.openxmlformats.org/drawingml/2006/main" r:embed="R110b0373a2f2420e">
             <a:alphaModFix amt="28000"/>
           </a:blip>
           <a:stretch xmlns:a="http://schemas.openxmlformats.org/drawingml/2006/main"/>
@@ -2176,7 +2176,7 @@
           <p:nvPr/>
         </p:nvPicPr>
         <p:blipFill rotWithShape="1">
-          <a:blip xmlns:r="http://schemas.openxmlformats.org/officeDocument/2006/relationships" xmlns:a="http://schemas.openxmlformats.org/drawingml/2006/main" r:embed="R8143138356f940ef">
+          <a:blip xmlns:r="http://schemas.openxmlformats.org/officeDocument/2006/relationships" xmlns:a="http://schemas.openxmlformats.org/drawingml/2006/main" r:embed="R19180ba960c848b8">
             <a:alphaModFix amt="28000"/>
           </a:blip>
           <a:stretch xmlns:a="http://schemas.openxmlformats.org/drawingml/2006/main"/>
@@ -2451,7 +2451,7 @@
           <p:nvPr/>
         </p:nvPicPr>
         <p:blipFill rotWithShape="1">
-          <a:blip xmlns:r="http://schemas.openxmlformats.org/officeDocument/2006/relationships" xmlns:a="http://schemas.openxmlformats.org/drawingml/2006/main" r:embed="R4d98e164a83e4578">
+          <a:blip xmlns:r="http://schemas.openxmlformats.org/officeDocument/2006/relationships" xmlns:a="http://schemas.openxmlformats.org/drawingml/2006/main" r:embed="Rb1328d866e0747f6">
             <a:alphaModFix amt="28000"/>
           </a:blip>
           <a:stretch xmlns:a="http://schemas.openxmlformats.org/drawingml/2006/main"/>
@@ -2875,7 +2875,7 @@
           <p:nvPr/>
         </p:nvPicPr>
         <p:blipFill rotWithShape="1">
-          <a:blip xmlns:r="http://schemas.openxmlformats.org/officeDocument/2006/relationships" xmlns:a="http://schemas.openxmlformats.org/drawingml/2006/main" r:embed="R6b22d46ec2db48a7">
+          <a:blip xmlns:r="http://schemas.openxmlformats.org/officeDocument/2006/relationships" xmlns:a="http://schemas.openxmlformats.org/drawingml/2006/main" r:embed="Rec63b2194d2e4982">
             <a:alphaModFix amt="28000"/>
           </a:blip>
           <a:stretch xmlns:a="http://schemas.openxmlformats.org/drawingml/2006/main"/>
@@ -3016,7 +3016,7 @@
           <p:nvPr/>
         </p:nvPicPr>
         <p:blipFill rotWithShape="1">
-          <a:blip xmlns:r="http://schemas.openxmlformats.org/officeDocument/2006/relationships" xmlns:a="http://schemas.openxmlformats.org/drawingml/2006/main" r:embed="R76a735c8fa584463">
+          <a:blip xmlns:r="http://schemas.openxmlformats.org/officeDocument/2006/relationships" xmlns:a="http://schemas.openxmlformats.org/drawingml/2006/main" r:embed="Ra8cef610e648458a">
             <a:alphaModFix amt="28000"/>
           </a:blip>
           <a:stretch xmlns:a="http://schemas.openxmlformats.org/drawingml/2006/main"/>
@@ -3130,7 +3130,7 @@
           <p:nvPr/>
         </p:nvPicPr>
         <p:blipFill rotWithShape="1">
-          <a:blip xmlns:r="http://schemas.openxmlformats.org/officeDocument/2006/relationships" xmlns:a="http://schemas.openxmlformats.org/drawingml/2006/main" r:embed="Rc46597edb8624e89">
+          <a:blip xmlns:r="http://schemas.openxmlformats.org/officeDocument/2006/relationships" xmlns:a="http://schemas.openxmlformats.org/drawingml/2006/main" r:embed="R32c86748d145479c">
             <a:alphaModFix amt="28000"/>
           </a:blip>
           <a:stretch xmlns:a="http://schemas.openxmlformats.org/drawingml/2006/main"/>
@@ -3457,7 +3457,7 @@
           <p:nvPr/>
         </p:nvPicPr>
         <p:blipFill rotWithShape="1">
-          <a:blip xmlns:r="http://schemas.openxmlformats.org/officeDocument/2006/relationships" xmlns:a="http://schemas.openxmlformats.org/drawingml/2006/main" r:embed="R67f88f70189d4034">
+          <a:blip xmlns:r="http://schemas.openxmlformats.org/officeDocument/2006/relationships" xmlns:a="http://schemas.openxmlformats.org/drawingml/2006/main" r:embed="R7752a56aa35d4985">
             <a:alphaModFix amt="28000"/>
           </a:blip>
           <a:stretch xmlns:a="http://schemas.openxmlformats.org/drawingml/2006/main"/>
@@ -3745,7 +3745,7 @@
           <p:nvPr/>
         </p:nvPicPr>
         <p:blipFill rotWithShape="1">
-          <a:blip xmlns:r="http://schemas.openxmlformats.org/officeDocument/2006/relationships" xmlns:a="http://schemas.openxmlformats.org/drawingml/2006/main" r:embed="Re120e08c33024ade">
+          <a:blip xmlns:r="http://schemas.openxmlformats.org/officeDocument/2006/relationships" xmlns:a="http://schemas.openxmlformats.org/drawingml/2006/main" r:embed="Rbac38aa798fb4ffa">
             <a:alphaModFix amt="28000"/>
           </a:blip>
           <a:stretch xmlns:a="http://schemas.openxmlformats.org/drawingml/2006/main"/>
@@ -3982,17 +3982,17 @@
   </p:cSld>
   <p:clrMap bg1="lt1" tx1="dk1" bg2="lt2" tx2="dk2" accent1="accent1" accent2="accent2" accent3="accent3" accent4="accent4" accent5="accent5" accent6="accent6" hlink="hlink" folHlink="folHlink"/>
   <p:sldLayoutIdLst>
-    <p:sldLayoutId xmlns:r="http://schemas.openxmlformats.org/officeDocument/2006/relationships" id="2147483649" r:id="R1deeb9cb59744b3f"/>
-    <p:sldLayoutId xmlns:r="http://schemas.openxmlformats.org/officeDocument/2006/relationships" id="2147483650" r:id="Rf43d986062c240e8"/>
-    <p:sldLayoutId xmlns:r="http://schemas.openxmlformats.org/officeDocument/2006/relationships" id="2147483651" r:id="R297900286a9b4176"/>
-    <p:sldLayoutId xmlns:r="http://schemas.openxmlformats.org/officeDocument/2006/relationships" id="2147483652" r:id="Re89355ea198244a0"/>
-    <p:sldLayoutId xmlns:r="http://schemas.openxmlformats.org/officeDocument/2006/relationships" id="2147483653" r:id="Re8fe9476b6a64e26"/>
-    <p:sldLayoutId xmlns:r="http://schemas.openxmlformats.org/officeDocument/2006/relationships" id="2147483654" r:id="R2b731e929d5c4cc6"/>
-    <p:sldLayoutId xmlns:r="http://schemas.openxmlformats.org/officeDocument/2006/relationships" id="2147483655" r:id="R223abe1219044992"/>
-    <p:sldLayoutId xmlns:r="http://schemas.openxmlformats.org/officeDocument/2006/relationships" id="2147483656" r:id="R37c2c12922df43e2"/>
-    <p:sldLayoutId xmlns:r="http://schemas.openxmlformats.org/officeDocument/2006/relationships" id="2147483657" r:id="Ra7ebfe52e2fa451e"/>
-    <p:sldLayoutId xmlns:r="http://schemas.openxmlformats.org/officeDocument/2006/relationships" id="2147483658" r:id="R1e4db348e88b4031"/>
-    <p:sldLayoutId xmlns:r="http://schemas.openxmlformats.org/officeDocument/2006/relationships" id="2147483659" r:id="R78606980593e4efa"/>
+    <p:sldLayoutId xmlns:r="http://schemas.openxmlformats.org/officeDocument/2006/relationships" id="2147483649" r:id="R8b73d0bd7279481e"/>
+    <p:sldLayoutId xmlns:r="http://schemas.openxmlformats.org/officeDocument/2006/relationships" id="2147483650" r:id="Rad26f36ee25942e4"/>
+    <p:sldLayoutId xmlns:r="http://schemas.openxmlformats.org/officeDocument/2006/relationships" id="2147483651" r:id="Rf4b71acab6fe4ee5"/>
+    <p:sldLayoutId xmlns:r="http://schemas.openxmlformats.org/officeDocument/2006/relationships" id="2147483652" r:id="R39f0aaa56d4f4c8d"/>
+    <p:sldLayoutId xmlns:r="http://schemas.openxmlformats.org/officeDocument/2006/relationships" id="2147483653" r:id="Rc045df05fdc54595"/>
+    <p:sldLayoutId xmlns:r="http://schemas.openxmlformats.org/officeDocument/2006/relationships" id="2147483654" r:id="Rfa826468cfc9448d"/>
+    <p:sldLayoutId xmlns:r="http://schemas.openxmlformats.org/officeDocument/2006/relationships" id="2147483655" r:id="R4bd8c6bd04e2469b"/>
+    <p:sldLayoutId xmlns:r="http://schemas.openxmlformats.org/officeDocument/2006/relationships" id="2147483656" r:id="R874c15fb196846b3"/>
+    <p:sldLayoutId xmlns:r="http://schemas.openxmlformats.org/officeDocument/2006/relationships" id="2147483657" r:id="R9cf696622ed24c97"/>
+    <p:sldLayoutId xmlns:r="http://schemas.openxmlformats.org/officeDocument/2006/relationships" id="2147483658" r:id="R5007ed0b36344046"/>
+    <p:sldLayoutId xmlns:r="http://schemas.openxmlformats.org/officeDocument/2006/relationships" id="2147483659" r:id="R83cbe1928fe94b59"/>
   </p:sldLayoutIdLst>
   <p:hf hdr="0" ftr="0" dt="0"/>
   <p:txStyles>
@@ -6941,7 +6941,73 @@
                 <a:ea typeface="Calibri"/>
                 <a:cs typeface="Calibri"/>
               </a:rPr>
-              <a:t>Use an underscore instead of a full stop. Asha and Khan should produce asha_khan.</a:t>
+              <a:t>Change the full stop between [first_name] and [last_name] to an underscore. Test </a:t>
+            </a:r>
+            <a:r>
+              <a:rPr sz="2400" b="0">
+                <a:solidFill>
+                  <a:srgbClr val="067D17"/>
+                </a:solidFill>
+                <a:latin typeface="JetBrains Mono"/>
+                <a:ea typeface="JetBrains Mono"/>
+                <a:cs typeface="JetBrains Mono"/>
+              </a:rPr>
+              <a:t>"Asha"</a:t>
+            </a:r>
+            <a:r>
+              <a:rPr sz="2400" b="0">
+                <a:solidFill>
+                  <a:srgbClr val="080808"/>
+                </a:solidFill>
+                <a:latin typeface="Calibri"/>
+                <a:ea typeface="Calibri"/>
+                <a:cs typeface="Calibri"/>
+              </a:rPr>
+              <a:t> and </a:t>
+            </a:r>
+            <a:r>
+              <a:rPr sz="2400" b="0">
+                <a:solidFill>
+                  <a:srgbClr val="067D17"/>
+                </a:solidFill>
+                <a:latin typeface="JetBrains Mono"/>
+                <a:ea typeface="JetBrains Mono"/>
+                <a:cs typeface="JetBrains Mono"/>
+              </a:rPr>
+              <a:t>"Khan"</a:t>
+            </a:r>
+            <a:r>
+              <a:rPr sz="2400" b="0">
+                <a:solidFill>
+                  <a:srgbClr val="080808"/>
+                </a:solidFill>
+                <a:latin typeface="Calibri"/>
+                <a:ea typeface="Calibri"/>
+                <a:cs typeface="Calibri"/>
+              </a:rPr>
+              <a:t>; display </a:t>
+            </a:r>
+            <a:r>
+              <a:rPr sz="2400" b="0">
+                <a:solidFill>
+                  <a:srgbClr val="067D17"/>
+                </a:solidFill>
+                <a:latin typeface="JetBrains Mono"/>
+                <a:ea typeface="JetBrains Mono"/>
+                <a:cs typeface="JetBrains Mono"/>
+              </a:rPr>
+              <a:t>"Username: asha_khan"</a:t>
+            </a:r>
+            <a:r>
+              <a:rPr sz="2400" b="0">
+                <a:solidFill>
+                  <a:srgbClr val="080808"/>
+                </a:solidFill>
+                <a:latin typeface="Calibri"/>
+                <a:ea typeface="Calibri"/>
+                <a:cs typeface="Calibri"/>
+              </a:rPr>
+              <a:t>.</a:t>
             </a:r>
           </a:p>
         </p:txBody>
@@ -7533,7 +7599,73 @@
                 <a:ea typeface="Calibri"/>
                 <a:cs typeface="Calibri"/>
               </a:rPr>
-              <a:t>Add a department input. Build account_label from lower-case last name, a hyphen and upper-case department. Khan and art should display khan-ART.</a:t>
+              <a:t>Ask for a last name and store it in [last_name]. Ask for a department code and store it in [department]. Join the lower-case last name, a hyphen and the upper-case department, then store the result in [account_label]. Test </a:t>
+            </a:r>
+            <a:r>
+              <a:rPr sz="2400" b="0">
+                <a:solidFill>
+                  <a:srgbClr val="067D17"/>
+                </a:solidFill>
+                <a:latin typeface="JetBrains Mono"/>
+                <a:ea typeface="JetBrains Mono"/>
+                <a:cs typeface="JetBrains Mono"/>
+              </a:rPr>
+              <a:t>"Khan"</a:t>
+            </a:r>
+            <a:r>
+              <a:rPr sz="2400" b="0">
+                <a:solidFill>
+                  <a:srgbClr val="080808"/>
+                </a:solidFill>
+                <a:latin typeface="Calibri"/>
+                <a:ea typeface="Calibri"/>
+                <a:cs typeface="Calibri"/>
+              </a:rPr>
+              <a:t> and </a:t>
+            </a:r>
+            <a:r>
+              <a:rPr sz="2400" b="0">
+                <a:solidFill>
+                  <a:srgbClr val="067D17"/>
+                </a:solidFill>
+                <a:latin typeface="JetBrains Mono"/>
+                <a:ea typeface="JetBrains Mono"/>
+                <a:cs typeface="JetBrains Mono"/>
+              </a:rPr>
+              <a:t>"art"</a:t>
+            </a:r>
+            <a:r>
+              <a:rPr sz="2400" b="0">
+                <a:solidFill>
+                  <a:srgbClr val="080808"/>
+                </a:solidFill>
+                <a:latin typeface="Calibri"/>
+                <a:ea typeface="Calibri"/>
+                <a:cs typeface="Calibri"/>
+              </a:rPr>
+              <a:t>; display </a:t>
+            </a:r>
+            <a:r>
+              <a:rPr sz="2400" b="0">
+                <a:solidFill>
+                  <a:srgbClr val="067D17"/>
+                </a:solidFill>
+                <a:latin typeface="JetBrains Mono"/>
+                <a:ea typeface="JetBrains Mono"/>
+                <a:cs typeface="JetBrains Mono"/>
+              </a:rPr>
+              <a:t>"Account label: khan-ART"</a:t>
+            </a:r>
+            <a:r>
+              <a:rPr sz="2400" b="0">
+                <a:solidFill>
+                  <a:srgbClr val="080808"/>
+                </a:solidFill>
+                <a:latin typeface="Calibri"/>
+                <a:ea typeface="Calibri"/>
+                <a:cs typeface="Calibri"/>
+              </a:rPr>
+              <a:t>.</a:t>
             </a:r>
           </a:p>
         </p:txBody>
@@ -8125,7 +8257,95 @@
                 <a:ea typeface="Calibri"/>
                 <a:cs typeface="Calibri"/>
               </a:rPr>
-              <a:t>Create an event tag from a venue, an activity and a two-letter group. The visible tag must use the structure venue/activity-GROUP with the venue and activity in lower case.</a:t>
+              <a:t>Ask for a venue, an activity and a two-letter group, then store the answers in [venue], [activity] and [group]. Join the lower-case venue, a forward slash, the lower-case activity, a hyphen and the upper-case group. Store the result in [tag]. Test </a:t>
+            </a:r>
+            <a:r>
+              <a:rPr sz="2400" b="0">
+                <a:solidFill>
+                  <a:srgbClr val="067D17"/>
+                </a:solidFill>
+                <a:latin typeface="JetBrains Mono"/>
+                <a:ea typeface="JetBrains Mono"/>
+                <a:cs typeface="JetBrains Mono"/>
+              </a:rPr>
+              <a:t>"Hall"</a:t>
+            </a:r>
+            <a:r>
+              <a:rPr sz="2400" b="0">
+                <a:solidFill>
+                  <a:srgbClr val="080808"/>
+                </a:solidFill>
+                <a:latin typeface="Calibri"/>
+                <a:ea typeface="Calibri"/>
+                <a:cs typeface="Calibri"/>
+              </a:rPr>
+              <a:t>, </a:t>
+            </a:r>
+            <a:r>
+              <a:rPr sz="2400" b="0">
+                <a:solidFill>
+                  <a:srgbClr val="067D17"/>
+                </a:solidFill>
+                <a:latin typeface="JetBrains Mono"/>
+                <a:ea typeface="JetBrains Mono"/>
+                <a:cs typeface="JetBrains Mono"/>
+              </a:rPr>
+              <a:t>"Quiz"</a:t>
+            </a:r>
+            <a:r>
+              <a:rPr sz="2400" b="0">
+                <a:solidFill>
+                  <a:srgbClr val="080808"/>
+                </a:solidFill>
+                <a:latin typeface="Calibri"/>
+                <a:ea typeface="Calibri"/>
+                <a:cs typeface="Calibri"/>
+              </a:rPr>
+              <a:t> and </a:t>
+            </a:r>
+            <a:r>
+              <a:rPr sz="2400" b="0">
+                <a:solidFill>
+                  <a:srgbClr val="067D17"/>
+                </a:solidFill>
+                <a:latin typeface="JetBrains Mono"/>
+                <a:ea typeface="JetBrains Mono"/>
+                <a:cs typeface="JetBrains Mono"/>
+              </a:rPr>
+              <a:t>"b2"</a:t>
+            </a:r>
+            <a:r>
+              <a:rPr sz="2400" b="0">
+                <a:solidFill>
+                  <a:srgbClr val="080808"/>
+                </a:solidFill>
+                <a:latin typeface="Calibri"/>
+                <a:ea typeface="Calibri"/>
+                <a:cs typeface="Calibri"/>
+              </a:rPr>
+              <a:t>; display </a:t>
+            </a:r>
+            <a:r>
+              <a:rPr sz="2400" b="0">
+                <a:solidFill>
+                  <a:srgbClr val="067D17"/>
+                </a:solidFill>
+                <a:latin typeface="JetBrains Mono"/>
+                <a:ea typeface="JetBrains Mono"/>
+                <a:cs typeface="JetBrains Mono"/>
+              </a:rPr>
+              <a:t>"Event tag: hall/quiz-B2"</a:t>
+            </a:r>
+            <a:r>
+              <a:rPr sz="2400" b="0">
+                <a:solidFill>
+                  <a:srgbClr val="080808"/>
+                </a:solidFill>
+                <a:latin typeface="Calibri"/>
+                <a:ea typeface="Calibri"/>
+                <a:cs typeface="Calibri"/>
+              </a:rPr>
+              <a:t>.</a:t>
             </a:r>
           </a:p>
         </p:txBody>

--- a/Mapped Curriculum Lessons/Grade 7/Lesson 15 - Joining Text/Joining Text - Slides.pptx
+++ b/Mapped Curriculum Lessons/Grade 7/Lesson 15 - Joining Text/Joining Text - Slides.pptx
@@ -2,28 +2,28 @@
 <file path=ppt/presentation.xml><?xml version="1.0" encoding="utf-8"?>
 <p:presentation xmlns:p="http://schemas.openxmlformats.org/presentationml/2006/main" embedTrueTypeFonts="1" saveSubsetFonts="0">
   <p:sldMasterIdLst>
-    <p:sldMasterId xmlns:r="http://schemas.openxmlformats.org/officeDocument/2006/relationships" id="2147483648" r:id="Ra2fc2761ead14d22"/>
+    <p:sldMasterId xmlns:r="http://schemas.openxmlformats.org/officeDocument/2006/relationships" id="2147483648" r:id="Rcc35dcb0a7074bf3"/>
   </p:sldMasterIdLst>
   <p:notesMasterIdLst>
-    <p:notesMasterId xmlns:r="http://schemas.openxmlformats.org/officeDocument/2006/relationships" r:id="Rbb32bbe64d9c4571"/>
+    <p:notesMasterId xmlns:r="http://schemas.openxmlformats.org/officeDocument/2006/relationships" r:id="R02f5cf1586e340ae"/>
   </p:notesMasterIdLst>
   <p:sldIdLst>
-    <p:sldId xmlns:r="http://schemas.openxmlformats.org/officeDocument/2006/relationships" id="256" r:id="Rd20b0334e1004378"/>
-    <p:sldId xmlns:r="http://schemas.openxmlformats.org/officeDocument/2006/relationships" id="257" r:id="R87e26b865e004308"/>
-    <p:sldId xmlns:r="http://schemas.openxmlformats.org/officeDocument/2006/relationships" id="258" r:id="R4eea7bc783904422"/>
-    <p:sldId xmlns:r="http://schemas.openxmlformats.org/officeDocument/2006/relationships" id="259" r:id="Rf0a406e9d38141f0"/>
-    <p:sldId xmlns:r="http://schemas.openxmlformats.org/officeDocument/2006/relationships" id="260" r:id="Rc54d58e8b6304359"/>
-    <p:sldId xmlns:r="http://schemas.openxmlformats.org/officeDocument/2006/relationships" id="261" r:id="R2bc48a4528934fad"/>
-    <p:sldId xmlns:r="http://schemas.openxmlformats.org/officeDocument/2006/relationships" id="262" r:id="R6815d21db7184b86"/>
-    <p:sldId xmlns:r="http://schemas.openxmlformats.org/officeDocument/2006/relationships" id="263" r:id="R9afcc02f21074bc1"/>
-    <p:sldId xmlns:r="http://schemas.openxmlformats.org/officeDocument/2006/relationships" id="264" r:id="R3f2aa2268f51494e"/>
+    <p:sldId xmlns:r="http://schemas.openxmlformats.org/officeDocument/2006/relationships" id="256" r:id="R64578a5d675c4366"/>
+    <p:sldId xmlns:r="http://schemas.openxmlformats.org/officeDocument/2006/relationships" id="257" r:id="R49f12361ce7f4637"/>
+    <p:sldId xmlns:r="http://schemas.openxmlformats.org/officeDocument/2006/relationships" id="258" r:id="R76886721f1c64bd4"/>
+    <p:sldId xmlns:r="http://schemas.openxmlformats.org/officeDocument/2006/relationships" id="259" r:id="Rb58e7c8d5ca849f1"/>
+    <p:sldId xmlns:r="http://schemas.openxmlformats.org/officeDocument/2006/relationships" id="260" r:id="Rf6fafec325e94335"/>
+    <p:sldId xmlns:r="http://schemas.openxmlformats.org/officeDocument/2006/relationships" id="261" r:id="Re147422f9a3e4b13"/>
+    <p:sldId xmlns:r="http://schemas.openxmlformats.org/officeDocument/2006/relationships" id="262" r:id="R7d1d2045e5564454"/>
+    <p:sldId xmlns:r="http://schemas.openxmlformats.org/officeDocument/2006/relationships" id="263" r:id="R11d17b9fc89c4bc6"/>
+    <p:sldId xmlns:r="http://schemas.openxmlformats.org/officeDocument/2006/relationships" id="264" r:id="Ra62bd76ff16b4000"/>
   </p:sldIdLst>
   <p:sldSz cx="12192000" cy="6858000"/>
   <p:notesSz cx="6858000" cy="9144000"/>
   <p:embeddedFontLst>
     <p:embeddedFont>
       <p:font typeface="JetBrains Mono"/>
-      <p:regular xmlns:r="http://schemas.openxmlformats.org/officeDocument/2006/relationships" r:id="Rd252aa3520f44ea7"/>
+      <p:regular xmlns:r="http://schemas.openxmlformats.org/officeDocument/2006/relationships" r:id="R622742f7ec684446"/>
     </p:embeddedFont>
   </p:embeddedFontLst>
 </p:presentation>
@@ -1071,7 +1071,7 @@
           <p:nvPr/>
         </p:nvPicPr>
         <p:blipFill rotWithShape="1">
-          <a:blip xmlns:r="http://schemas.openxmlformats.org/officeDocument/2006/relationships" xmlns:a="http://schemas.openxmlformats.org/drawingml/2006/main" r:embed="R2963c7c392b54a04"/>
+          <a:blip xmlns:r="http://schemas.openxmlformats.org/officeDocument/2006/relationships" xmlns:a="http://schemas.openxmlformats.org/drawingml/2006/main" r:embed="R1a3c0ca2d9f64d93"/>
           <a:stretch xmlns:a="http://schemas.openxmlformats.org/drawingml/2006/main"/>
         </p:blipFill>
         <p:spPr>
@@ -1451,7 +1451,7 @@
           <p:nvPr/>
         </p:nvPicPr>
         <p:blipFill rotWithShape="1">
-          <a:blip xmlns:r="http://schemas.openxmlformats.org/officeDocument/2006/relationships" xmlns:a="http://schemas.openxmlformats.org/drawingml/2006/main" r:embed="R3252df16f36c4e27">
+          <a:blip xmlns:r="http://schemas.openxmlformats.org/officeDocument/2006/relationships" xmlns:a="http://schemas.openxmlformats.org/drawingml/2006/main" r:embed="Rb99be12d1b834ee0">
             <a:alphaModFix amt="28000"/>
           </a:blip>
           <a:stretch xmlns:a="http://schemas.openxmlformats.org/drawingml/2006/main"/>
@@ -1664,7 +1664,7 @@
           <p:nvPr/>
         </p:nvPicPr>
         <p:blipFill rotWithShape="1">
-          <a:blip xmlns:r="http://schemas.openxmlformats.org/officeDocument/2006/relationships" xmlns:a="http://schemas.openxmlformats.org/drawingml/2006/main" r:embed="R4c3b980607a34040">
+          <a:blip xmlns:r="http://schemas.openxmlformats.org/officeDocument/2006/relationships" xmlns:a="http://schemas.openxmlformats.org/drawingml/2006/main" r:embed="R4634fef9eff4444c">
             <a:alphaModFix amt="28000"/>
           </a:blip>
           <a:stretch xmlns:a="http://schemas.openxmlformats.org/drawingml/2006/main"/>
@@ -1899,7 +1899,7 @@
           <p:nvPr/>
         </p:nvPicPr>
         <p:blipFill rotWithShape="1">
-          <a:blip xmlns:r="http://schemas.openxmlformats.org/officeDocument/2006/relationships" xmlns:a="http://schemas.openxmlformats.org/drawingml/2006/main" r:embed="R110b0373a2f2420e">
+          <a:blip xmlns:r="http://schemas.openxmlformats.org/officeDocument/2006/relationships" xmlns:a="http://schemas.openxmlformats.org/drawingml/2006/main" r:embed="Rcabfe32d1d6a4f37">
             <a:alphaModFix amt="28000"/>
           </a:blip>
           <a:stretch xmlns:a="http://schemas.openxmlformats.org/drawingml/2006/main"/>
@@ -2176,7 +2176,7 @@
           <p:nvPr/>
         </p:nvPicPr>
         <p:blipFill rotWithShape="1">
-          <a:blip xmlns:r="http://schemas.openxmlformats.org/officeDocument/2006/relationships" xmlns:a="http://schemas.openxmlformats.org/drawingml/2006/main" r:embed="R19180ba960c848b8">
+          <a:blip xmlns:r="http://schemas.openxmlformats.org/officeDocument/2006/relationships" xmlns:a="http://schemas.openxmlformats.org/drawingml/2006/main" r:embed="R85489ee3c8974496">
             <a:alphaModFix amt="28000"/>
           </a:blip>
           <a:stretch xmlns:a="http://schemas.openxmlformats.org/drawingml/2006/main"/>
@@ -2451,7 +2451,7 @@
           <p:nvPr/>
         </p:nvPicPr>
         <p:blipFill rotWithShape="1">
-          <a:blip xmlns:r="http://schemas.openxmlformats.org/officeDocument/2006/relationships" xmlns:a="http://schemas.openxmlformats.org/drawingml/2006/main" r:embed="Rb1328d866e0747f6">
+          <a:blip xmlns:r="http://schemas.openxmlformats.org/officeDocument/2006/relationships" xmlns:a="http://schemas.openxmlformats.org/drawingml/2006/main" r:embed="R9b130daa87154ca1">
             <a:alphaModFix amt="28000"/>
           </a:blip>
           <a:stretch xmlns:a="http://schemas.openxmlformats.org/drawingml/2006/main"/>
@@ -2875,7 +2875,7 @@
           <p:nvPr/>
         </p:nvPicPr>
         <p:blipFill rotWithShape="1">
-          <a:blip xmlns:r="http://schemas.openxmlformats.org/officeDocument/2006/relationships" xmlns:a="http://schemas.openxmlformats.org/drawingml/2006/main" r:embed="Rec63b2194d2e4982">
+          <a:blip xmlns:r="http://schemas.openxmlformats.org/officeDocument/2006/relationships" xmlns:a="http://schemas.openxmlformats.org/drawingml/2006/main" r:embed="Rd79b833bb6a94db8">
             <a:alphaModFix amt="28000"/>
           </a:blip>
           <a:stretch xmlns:a="http://schemas.openxmlformats.org/drawingml/2006/main"/>
@@ -3016,7 +3016,7 @@
           <p:nvPr/>
         </p:nvPicPr>
         <p:blipFill rotWithShape="1">
-          <a:blip xmlns:r="http://schemas.openxmlformats.org/officeDocument/2006/relationships" xmlns:a="http://schemas.openxmlformats.org/drawingml/2006/main" r:embed="Ra8cef610e648458a">
+          <a:blip xmlns:r="http://schemas.openxmlformats.org/officeDocument/2006/relationships" xmlns:a="http://schemas.openxmlformats.org/drawingml/2006/main" r:embed="Rf4c0870a8d3f4c24">
             <a:alphaModFix amt="28000"/>
           </a:blip>
           <a:stretch xmlns:a="http://schemas.openxmlformats.org/drawingml/2006/main"/>
@@ -3130,7 +3130,7 @@
           <p:nvPr/>
         </p:nvPicPr>
         <p:blipFill rotWithShape="1">
-          <a:blip xmlns:r="http://schemas.openxmlformats.org/officeDocument/2006/relationships" xmlns:a="http://schemas.openxmlformats.org/drawingml/2006/main" r:embed="R32c86748d145479c">
+          <a:blip xmlns:r="http://schemas.openxmlformats.org/officeDocument/2006/relationships" xmlns:a="http://schemas.openxmlformats.org/drawingml/2006/main" r:embed="Re9037e0474cd4258">
             <a:alphaModFix amt="28000"/>
           </a:blip>
           <a:stretch xmlns:a="http://schemas.openxmlformats.org/drawingml/2006/main"/>
@@ -3457,7 +3457,7 @@
           <p:nvPr/>
         </p:nvPicPr>
         <p:blipFill rotWithShape="1">
-          <a:blip xmlns:r="http://schemas.openxmlformats.org/officeDocument/2006/relationships" xmlns:a="http://schemas.openxmlformats.org/drawingml/2006/main" r:embed="R7752a56aa35d4985">
+          <a:blip xmlns:r="http://schemas.openxmlformats.org/officeDocument/2006/relationships" xmlns:a="http://schemas.openxmlformats.org/drawingml/2006/main" r:embed="Ra9211aa213f54217">
             <a:alphaModFix amt="28000"/>
           </a:blip>
           <a:stretch xmlns:a="http://schemas.openxmlformats.org/drawingml/2006/main"/>
@@ -3745,7 +3745,7 @@
           <p:nvPr/>
         </p:nvPicPr>
         <p:blipFill rotWithShape="1">
-          <a:blip xmlns:r="http://schemas.openxmlformats.org/officeDocument/2006/relationships" xmlns:a="http://schemas.openxmlformats.org/drawingml/2006/main" r:embed="Rbac38aa798fb4ffa">
+          <a:blip xmlns:r="http://schemas.openxmlformats.org/officeDocument/2006/relationships" xmlns:a="http://schemas.openxmlformats.org/drawingml/2006/main" r:embed="Rb8185aeeaa274ea9">
             <a:alphaModFix amt="28000"/>
           </a:blip>
           <a:stretch xmlns:a="http://schemas.openxmlformats.org/drawingml/2006/main"/>
@@ -3982,17 +3982,17 @@
   </p:cSld>
   <p:clrMap bg1="lt1" tx1="dk1" bg2="lt2" tx2="dk2" accent1="accent1" accent2="accent2" accent3="accent3" accent4="accent4" accent5="accent5" accent6="accent6" hlink="hlink" folHlink="folHlink"/>
   <p:sldLayoutIdLst>
-    <p:sldLayoutId xmlns:r="http://schemas.openxmlformats.org/officeDocument/2006/relationships" id="2147483649" r:id="R8b73d0bd7279481e"/>
-    <p:sldLayoutId xmlns:r="http://schemas.openxmlformats.org/officeDocument/2006/relationships" id="2147483650" r:id="Rad26f36ee25942e4"/>
-    <p:sldLayoutId xmlns:r="http://schemas.openxmlformats.org/officeDocument/2006/relationships" id="2147483651" r:id="Rf4b71acab6fe4ee5"/>
-    <p:sldLayoutId xmlns:r="http://schemas.openxmlformats.org/officeDocument/2006/relationships" id="2147483652" r:id="R39f0aaa56d4f4c8d"/>
-    <p:sldLayoutId xmlns:r="http://schemas.openxmlformats.org/officeDocument/2006/relationships" id="2147483653" r:id="Rc045df05fdc54595"/>
-    <p:sldLayoutId xmlns:r="http://schemas.openxmlformats.org/officeDocument/2006/relationships" id="2147483654" r:id="Rfa826468cfc9448d"/>
-    <p:sldLayoutId xmlns:r="http://schemas.openxmlformats.org/officeDocument/2006/relationships" id="2147483655" r:id="R4bd8c6bd04e2469b"/>
-    <p:sldLayoutId xmlns:r="http://schemas.openxmlformats.org/officeDocument/2006/relationships" id="2147483656" r:id="R874c15fb196846b3"/>
-    <p:sldLayoutId xmlns:r="http://schemas.openxmlformats.org/officeDocument/2006/relationships" id="2147483657" r:id="R9cf696622ed24c97"/>
-    <p:sldLayoutId xmlns:r="http://schemas.openxmlformats.org/officeDocument/2006/relationships" id="2147483658" r:id="R5007ed0b36344046"/>
-    <p:sldLayoutId xmlns:r="http://schemas.openxmlformats.org/officeDocument/2006/relationships" id="2147483659" r:id="R83cbe1928fe94b59"/>
+    <p:sldLayoutId xmlns:r="http://schemas.openxmlformats.org/officeDocument/2006/relationships" id="2147483649" r:id="R315b33c09a814440"/>
+    <p:sldLayoutId xmlns:r="http://schemas.openxmlformats.org/officeDocument/2006/relationships" id="2147483650" r:id="R8c2d1bde15f24db2"/>
+    <p:sldLayoutId xmlns:r="http://schemas.openxmlformats.org/officeDocument/2006/relationships" id="2147483651" r:id="Rbd48d04a20404118"/>
+    <p:sldLayoutId xmlns:r="http://schemas.openxmlformats.org/officeDocument/2006/relationships" id="2147483652" r:id="Rb40f4d3a693b4ec6"/>
+    <p:sldLayoutId xmlns:r="http://schemas.openxmlformats.org/officeDocument/2006/relationships" id="2147483653" r:id="Rd5319a6bf43e47ae"/>
+    <p:sldLayoutId xmlns:r="http://schemas.openxmlformats.org/officeDocument/2006/relationships" id="2147483654" r:id="Rf4705156dc2c427d"/>
+    <p:sldLayoutId xmlns:r="http://schemas.openxmlformats.org/officeDocument/2006/relationships" id="2147483655" r:id="Rd95fed3ff56348cc"/>
+    <p:sldLayoutId xmlns:r="http://schemas.openxmlformats.org/officeDocument/2006/relationships" id="2147483656" r:id="Rc428819ba9b043b5"/>
+    <p:sldLayoutId xmlns:r="http://schemas.openxmlformats.org/officeDocument/2006/relationships" id="2147483657" r:id="R546dc27eb1214010"/>
+    <p:sldLayoutId xmlns:r="http://schemas.openxmlformats.org/officeDocument/2006/relationships" id="2147483658" r:id="R413b3e51106d4ba0"/>
+    <p:sldLayoutId xmlns:r="http://schemas.openxmlformats.org/officeDocument/2006/relationships" id="2147483659" r:id="Redf44161854f4c93"/>
   </p:sldLayoutIdLst>
   <p:hf hdr="0" ftr="0" dt="0"/>
   <p:txStyles>
@@ -6941,10 +6941,10 @@
                 <a:ea typeface="Calibri"/>
                 <a:cs typeface="Calibri"/>
               </a:rPr>
-              <a:t>Change the full stop between [first_name] and [last_name] to an underscore. Test </a:t>
-            </a:r>
-            <a:r>
-              <a:rPr sz="2400" b="0">
+              <a:t>Change the example so the username is the first letter of the first name joined to the whole last name, all in lowercase. Use position 0 to get the first letter. For example, </a:t>
+            </a:r>
+            <a:r>
+              <a:rPr sz="2050" b="0">
                 <a:solidFill>
                   <a:srgbClr val="067D17"/>
                 </a:solidFill>
@@ -6966,7 +6966,7 @@
               <a:t> and </a:t>
             </a:r>
             <a:r>
-              <a:rPr sz="2400" b="0">
+              <a:rPr sz="2050" b="0">
                 <a:solidFill>
                   <a:srgbClr val="067D17"/>
                 </a:solidFill>
@@ -6985,10 +6985,10 @@
                 <a:ea typeface="Calibri"/>
                 <a:cs typeface="Calibri"/>
               </a:rPr>
-              <a:t>; display </a:t>
-            </a:r>
-            <a:r>
-              <a:rPr sz="2400" b="0">
+              <a:t> display </a:t>
+            </a:r>
+            <a:r>
+              <a:rPr sz="2050" b="0">
                 <a:solidFill>
                   <a:srgbClr val="067D17"/>
                 </a:solidFill>
@@ -6996,7 +6996,7 @@
                 <a:ea typeface="JetBrains Mono"/>
                 <a:cs typeface="JetBrains Mono"/>
               </a:rPr>
-              <a:t>"Username: asha_khan"</a:t>
+              <a:t>"Username: akhan"</a:t>
             </a:r>
             <a:r>
               <a:rPr sz="2400" b="0">
@@ -7599,18 +7599,21 @@
                 <a:ea typeface="Calibri"/>
                 <a:cs typeface="Calibri"/>
               </a:rPr>
-              <a:t>Ask for a last name and store it in [last_name]. Ask for a department code and store it in [department]. Join the lower-case last name, a hyphen and the upper-case department, then store the result in [account_label]. Test </a:t>
-            </a:r>
-            <a:r>
-              <a:rPr sz="2400" b="0">
-                <a:solidFill>
-                  <a:srgbClr val="067D17"/>
-                </a:solidFill>
-                <a:latin typeface="JetBrains Mono"/>
-                <a:ea typeface="JetBrains Mono"/>
-                <a:cs typeface="JetBrains Mono"/>
-              </a:rPr>
-              <a:t>"Khan"</a:t>
+              <a:t>Change the example so it asks for </a:t>
+            </a:r>
+            <a:r>
+              <a:rPr sz="2050" b="0">
+                <a:solidFill>
+                  <a:srgbClr val="6A1B9A"/>
+                </a:solidFill>
+                <a:highlight>
+                  <a:srgbClr val="ECEAF4"/>
+                </a:highlight>
+                <a:latin typeface="JetBrains Mono"/>
+                <a:ea typeface="JetBrains Mono"/>
+                <a:cs typeface="JetBrains Mono"/>
+              </a:rPr>
+              <a:t> last_name </a:t>
             </a:r>
             <a:r>
               <a:rPr sz="2400" b="0">
@@ -7621,18 +7624,21 @@
                 <a:ea typeface="Calibri"/>
                 <a:cs typeface="Calibri"/>
               </a:rPr>
-              <a:t> and </a:t>
-            </a:r>
-            <a:r>
-              <a:rPr sz="2400" b="0">
-                <a:solidFill>
-                  <a:srgbClr val="067D17"/>
-                </a:solidFill>
-                <a:latin typeface="JetBrains Mono"/>
-                <a:ea typeface="JetBrains Mono"/>
-                <a:cs typeface="JetBrains Mono"/>
-              </a:rPr>
-              <a:t>"art"</a:t>
+              <a:t> and a department code in </a:t>
+            </a:r>
+            <a:r>
+              <a:rPr sz="2050" b="0">
+                <a:solidFill>
+                  <a:srgbClr val="6A1B9A"/>
+                </a:solidFill>
+                <a:highlight>
+                  <a:srgbClr val="ECEAF4"/>
+                </a:highlight>
+                <a:latin typeface="JetBrains Mono"/>
+                <a:ea typeface="JetBrains Mono"/>
+                <a:cs typeface="JetBrains Mono"/>
+              </a:rPr>
+              <a:t> department </a:t>
             </a:r>
             <a:r>
               <a:rPr sz="2400" b="0">
@@ -7643,10 +7649,98 @@
                 <a:ea typeface="Calibri"/>
                 <a:cs typeface="Calibri"/>
               </a:rPr>
-              <a:t>; display </a:t>
+              <a:t>. Join the lowercase last name, </a:t>
+            </a:r>
+            <a:r>
+              <a:rPr sz="2050" b="0">
+                <a:solidFill>
+                  <a:srgbClr val="067D17"/>
+                </a:solidFill>
+                <a:latin typeface="JetBrains Mono"/>
+                <a:ea typeface="JetBrains Mono"/>
+                <a:cs typeface="JetBrains Mono"/>
+              </a:rPr>
+              <a:t>"-"</a:t>
             </a:r>
             <a:r>
               <a:rPr sz="2400" b="0">
+                <a:solidFill>
+                  <a:srgbClr val="080808"/>
+                </a:solidFill>
+                <a:latin typeface="Calibri"/>
+                <a:ea typeface="Calibri"/>
+                <a:cs typeface="Calibri"/>
+              </a:rPr>
+              <a:t> and the uppercase department, and display the result after </a:t>
+            </a:r>
+            <a:r>
+              <a:rPr sz="2050" b="0">
+                <a:solidFill>
+                  <a:srgbClr val="067D17"/>
+                </a:solidFill>
+                <a:latin typeface="JetBrains Mono"/>
+                <a:ea typeface="JetBrains Mono"/>
+                <a:cs typeface="JetBrains Mono"/>
+              </a:rPr>
+              <a:t>"Account label:"</a:t>
+            </a:r>
+            <a:r>
+              <a:rPr sz="2400" b="0">
+                <a:solidFill>
+                  <a:srgbClr val="080808"/>
+                </a:solidFill>
+                <a:latin typeface="Calibri"/>
+                <a:ea typeface="Calibri"/>
+                <a:cs typeface="Calibri"/>
+              </a:rPr>
+              <a:t>. For example, </a:t>
+            </a:r>
+            <a:r>
+              <a:rPr sz="2050" b="0">
+                <a:solidFill>
+                  <a:srgbClr val="067D17"/>
+                </a:solidFill>
+                <a:latin typeface="JetBrains Mono"/>
+                <a:ea typeface="JetBrains Mono"/>
+                <a:cs typeface="JetBrains Mono"/>
+              </a:rPr>
+              <a:t>"Khan"</a:t>
+            </a:r>
+            <a:r>
+              <a:rPr sz="2400" b="0">
+                <a:solidFill>
+                  <a:srgbClr val="080808"/>
+                </a:solidFill>
+                <a:latin typeface="Calibri"/>
+                <a:ea typeface="Calibri"/>
+                <a:cs typeface="Calibri"/>
+              </a:rPr>
+              <a:t> and </a:t>
+            </a:r>
+            <a:r>
+              <a:rPr sz="2050" b="0">
+                <a:solidFill>
+                  <a:srgbClr val="067D17"/>
+                </a:solidFill>
+                <a:latin typeface="JetBrains Mono"/>
+                <a:ea typeface="JetBrains Mono"/>
+                <a:cs typeface="JetBrains Mono"/>
+              </a:rPr>
+              <a:t>"art"</a:t>
+            </a:r>
+            <a:r>
+              <a:rPr sz="2400" b="0">
+                <a:solidFill>
+                  <a:srgbClr val="080808"/>
+                </a:solidFill>
+                <a:latin typeface="Calibri"/>
+                <a:ea typeface="Calibri"/>
+                <a:cs typeface="Calibri"/>
+              </a:rPr>
+              <a:t> display </a:t>
+            </a:r>
+            <a:r>
+              <a:rPr sz="2050" b="0">
                 <a:solidFill>
                   <a:srgbClr val="067D17"/>
                 </a:solidFill>
@@ -8238,7 +8332,7 @@
         </p:spPr>
         <p:txBody>
           <a:bodyPr xmlns:a="http://schemas.openxmlformats.org/drawingml/2006/main">
-            <a:normAutofit fontScale="100000"/>
+            <a:normAutofit fontScale="98094"/>
           </a:bodyPr>
           <a:lstStyle xmlns:a="http://schemas.openxmlformats.org/drawingml/2006/main"/>
           <a:p xmlns:a="http://schemas.openxmlformats.org/drawingml/2006/main">
@@ -8257,10 +8351,10 @@
                 <a:ea typeface="Calibri"/>
                 <a:cs typeface="Calibri"/>
               </a:rPr>
-              <a:t>Ask for a venue, an activity and a two-letter group, then store the answers in [venue], [activity] and [group]. Join the lower-case venue, a forward slash, the lower-case activity, a hyphen and the upper-case group. Store the result in [tag]. Test </a:t>
-            </a:r>
-            <a:r>
-              <a:rPr sz="2400" b="0">
+              <a:t>Create an event-tag program that asks for a venue, an activity and a two-character group code. Join them as venue/activity-GROUP, with the venue and activity in lowercase and the group in uppercase. Display the result after </a:t>
+            </a:r>
+            <a:r>
+              <a:rPr sz="2050" b="0">
                 <a:solidFill>
                   <a:srgbClr val="067D17"/>
                 </a:solidFill>
@@ -8268,7 +8362,7 @@
                 <a:ea typeface="JetBrains Mono"/>
                 <a:cs typeface="JetBrains Mono"/>
               </a:rPr>
-              <a:t>"Hall"</a:t>
+              <a:t>"Event tag:"</a:t>
             </a:r>
             <a:r>
               <a:rPr sz="2400" b="0">
@@ -8279,10 +8373,10 @@
                 <a:ea typeface="Calibri"/>
                 <a:cs typeface="Calibri"/>
               </a:rPr>
-              <a:t>, </a:t>
-            </a:r>
-            <a:r>
-              <a:rPr sz="2400" b="0">
+              <a:t>. For example, </a:t>
+            </a:r>
+            <a:r>
+              <a:rPr sz="2050" b="0">
                 <a:solidFill>
                   <a:srgbClr val="067D17"/>
                 </a:solidFill>
@@ -8290,7 +8384,7 @@
                 <a:ea typeface="JetBrains Mono"/>
                 <a:cs typeface="JetBrains Mono"/>
               </a:rPr>
-              <a:t>"Quiz"</a:t>
+              <a:t>"Hall"</a:t>
             </a:r>
             <a:r>
               <a:rPr sz="2400" b="0">
@@ -8301,10 +8395,10 @@
                 <a:ea typeface="Calibri"/>
                 <a:cs typeface="Calibri"/>
               </a:rPr>
-              <a:t> and </a:t>
-            </a:r>
-            <a:r>
-              <a:rPr sz="2400" b="0">
+              <a:t>, </a:t>
+            </a:r>
+            <a:r>
+              <a:rPr sz="2050" b="0">
                 <a:solidFill>
                   <a:srgbClr val="067D17"/>
                 </a:solidFill>
@@ -8312,7 +8406,7 @@
                 <a:ea typeface="JetBrains Mono"/>
                 <a:cs typeface="JetBrains Mono"/>
               </a:rPr>
-              <a:t>"b2"</a:t>
+              <a:t>"Quiz"</a:t>
             </a:r>
             <a:r>
               <a:rPr sz="2400" b="0">
@@ -8323,10 +8417,32 @@
                 <a:ea typeface="Calibri"/>
                 <a:cs typeface="Calibri"/>
               </a:rPr>
-              <a:t>; display </a:t>
+              <a:t> and </a:t>
+            </a:r>
+            <a:r>
+              <a:rPr sz="2050" b="0">
+                <a:solidFill>
+                  <a:srgbClr val="067D17"/>
+                </a:solidFill>
+                <a:latin typeface="JetBrains Mono"/>
+                <a:ea typeface="JetBrains Mono"/>
+                <a:cs typeface="JetBrains Mono"/>
+              </a:rPr>
+              <a:t>"b2"</a:t>
             </a:r>
             <a:r>
               <a:rPr sz="2400" b="0">
+                <a:solidFill>
+                  <a:srgbClr val="080808"/>
+                </a:solidFill>
+                <a:latin typeface="Calibri"/>
+                <a:ea typeface="Calibri"/>
+                <a:cs typeface="Calibri"/>
+              </a:rPr>
+              <a:t> display </a:t>
+            </a:r>
+            <a:r>
+              <a:rPr sz="2050" b="0">
                 <a:solidFill>
                   <a:srgbClr val="067D17"/>
                 </a:solidFill>

--- a/Mapped Curriculum Lessons/Grade 7/Lesson 15 - Joining Text/Joining Text - Slides.pptx
+++ b/Mapped Curriculum Lessons/Grade 7/Lesson 15 - Joining Text/Joining Text - Slides.pptx
@@ -2,28 +2,28 @@
 <file path=ppt/presentation.xml><?xml version="1.0" encoding="utf-8"?>
 <p:presentation xmlns:p="http://schemas.openxmlformats.org/presentationml/2006/main" embedTrueTypeFonts="1" saveSubsetFonts="0">
   <p:sldMasterIdLst>
-    <p:sldMasterId xmlns:r="http://schemas.openxmlformats.org/officeDocument/2006/relationships" id="2147483648" r:id="Rcc35dcb0a7074bf3"/>
+    <p:sldMasterId xmlns:r="http://schemas.openxmlformats.org/officeDocument/2006/relationships" id="2147483648" r:id="Rc6b7717fe74246e6"/>
   </p:sldMasterIdLst>
   <p:notesMasterIdLst>
-    <p:notesMasterId xmlns:r="http://schemas.openxmlformats.org/officeDocument/2006/relationships" r:id="R02f5cf1586e340ae"/>
+    <p:notesMasterId xmlns:r="http://schemas.openxmlformats.org/officeDocument/2006/relationships" r:id="Reca75bfd523b4376"/>
   </p:notesMasterIdLst>
   <p:sldIdLst>
-    <p:sldId xmlns:r="http://schemas.openxmlformats.org/officeDocument/2006/relationships" id="256" r:id="R64578a5d675c4366"/>
-    <p:sldId xmlns:r="http://schemas.openxmlformats.org/officeDocument/2006/relationships" id="257" r:id="R49f12361ce7f4637"/>
-    <p:sldId xmlns:r="http://schemas.openxmlformats.org/officeDocument/2006/relationships" id="258" r:id="R76886721f1c64bd4"/>
-    <p:sldId xmlns:r="http://schemas.openxmlformats.org/officeDocument/2006/relationships" id="259" r:id="Rb58e7c8d5ca849f1"/>
-    <p:sldId xmlns:r="http://schemas.openxmlformats.org/officeDocument/2006/relationships" id="260" r:id="Rf6fafec325e94335"/>
-    <p:sldId xmlns:r="http://schemas.openxmlformats.org/officeDocument/2006/relationships" id="261" r:id="Re147422f9a3e4b13"/>
-    <p:sldId xmlns:r="http://schemas.openxmlformats.org/officeDocument/2006/relationships" id="262" r:id="R7d1d2045e5564454"/>
-    <p:sldId xmlns:r="http://schemas.openxmlformats.org/officeDocument/2006/relationships" id="263" r:id="R11d17b9fc89c4bc6"/>
-    <p:sldId xmlns:r="http://schemas.openxmlformats.org/officeDocument/2006/relationships" id="264" r:id="Ra62bd76ff16b4000"/>
+    <p:sldId xmlns:r="http://schemas.openxmlformats.org/officeDocument/2006/relationships" id="256" r:id="R83c10156f26f46df"/>
+    <p:sldId xmlns:r="http://schemas.openxmlformats.org/officeDocument/2006/relationships" id="257" r:id="Ra6a282f961f547dc"/>
+    <p:sldId xmlns:r="http://schemas.openxmlformats.org/officeDocument/2006/relationships" id="258" r:id="R70d308eda5e54bb6"/>
+    <p:sldId xmlns:r="http://schemas.openxmlformats.org/officeDocument/2006/relationships" id="259" r:id="R4f6ff537ec644052"/>
+    <p:sldId xmlns:r="http://schemas.openxmlformats.org/officeDocument/2006/relationships" id="260" r:id="Rf76b76b584f84a9b"/>
+    <p:sldId xmlns:r="http://schemas.openxmlformats.org/officeDocument/2006/relationships" id="261" r:id="R91c98bd9e7ac4217"/>
+    <p:sldId xmlns:r="http://schemas.openxmlformats.org/officeDocument/2006/relationships" id="262" r:id="R39bad3abb5fc4d83"/>
+    <p:sldId xmlns:r="http://schemas.openxmlformats.org/officeDocument/2006/relationships" id="263" r:id="Ra8f1162346c14e17"/>
+    <p:sldId xmlns:r="http://schemas.openxmlformats.org/officeDocument/2006/relationships" id="264" r:id="R10e23a66e0cd4cff"/>
   </p:sldIdLst>
   <p:sldSz cx="12192000" cy="6858000"/>
   <p:notesSz cx="6858000" cy="9144000"/>
   <p:embeddedFontLst>
     <p:embeddedFont>
       <p:font typeface="JetBrains Mono"/>
-      <p:regular xmlns:r="http://schemas.openxmlformats.org/officeDocument/2006/relationships" r:id="R622742f7ec684446"/>
+      <p:regular xmlns:r="http://schemas.openxmlformats.org/officeDocument/2006/relationships" r:id="R6faa8a797620493a"/>
     </p:embeddedFont>
   </p:embeddedFontLst>
 </p:presentation>
@@ -1071,7 +1071,7 @@
           <p:nvPr/>
         </p:nvPicPr>
         <p:blipFill rotWithShape="1">
-          <a:blip xmlns:r="http://schemas.openxmlformats.org/officeDocument/2006/relationships" xmlns:a="http://schemas.openxmlformats.org/drawingml/2006/main" r:embed="R1a3c0ca2d9f64d93"/>
+          <a:blip xmlns:r="http://schemas.openxmlformats.org/officeDocument/2006/relationships" xmlns:a="http://schemas.openxmlformats.org/drawingml/2006/main" r:embed="R77b748e32b3946ef"/>
           <a:stretch xmlns:a="http://schemas.openxmlformats.org/drawingml/2006/main"/>
         </p:blipFill>
         <p:spPr>
@@ -1451,7 +1451,7 @@
           <p:nvPr/>
         </p:nvPicPr>
         <p:blipFill rotWithShape="1">
-          <a:blip xmlns:r="http://schemas.openxmlformats.org/officeDocument/2006/relationships" xmlns:a="http://schemas.openxmlformats.org/drawingml/2006/main" r:embed="Rb99be12d1b834ee0">
+          <a:blip xmlns:r="http://schemas.openxmlformats.org/officeDocument/2006/relationships" xmlns:a="http://schemas.openxmlformats.org/drawingml/2006/main" r:embed="R3fb8fee914fb4ce5">
             <a:alphaModFix amt="28000"/>
           </a:blip>
           <a:stretch xmlns:a="http://schemas.openxmlformats.org/drawingml/2006/main"/>
@@ -1664,7 +1664,7 @@
           <p:nvPr/>
         </p:nvPicPr>
         <p:blipFill rotWithShape="1">
-          <a:blip xmlns:r="http://schemas.openxmlformats.org/officeDocument/2006/relationships" xmlns:a="http://schemas.openxmlformats.org/drawingml/2006/main" r:embed="R4634fef9eff4444c">
+          <a:blip xmlns:r="http://schemas.openxmlformats.org/officeDocument/2006/relationships" xmlns:a="http://schemas.openxmlformats.org/drawingml/2006/main" r:embed="R71f062e247da4710">
             <a:alphaModFix amt="28000"/>
           </a:blip>
           <a:stretch xmlns:a="http://schemas.openxmlformats.org/drawingml/2006/main"/>
@@ -1899,7 +1899,7 @@
           <p:nvPr/>
         </p:nvPicPr>
         <p:blipFill rotWithShape="1">
-          <a:blip xmlns:r="http://schemas.openxmlformats.org/officeDocument/2006/relationships" xmlns:a="http://schemas.openxmlformats.org/drawingml/2006/main" r:embed="Rcabfe32d1d6a4f37">
+          <a:blip xmlns:r="http://schemas.openxmlformats.org/officeDocument/2006/relationships" xmlns:a="http://schemas.openxmlformats.org/drawingml/2006/main" r:embed="R8e3d4ac238344996">
             <a:alphaModFix amt="28000"/>
           </a:blip>
           <a:stretch xmlns:a="http://schemas.openxmlformats.org/drawingml/2006/main"/>
@@ -2176,7 +2176,7 @@
           <p:nvPr/>
         </p:nvPicPr>
         <p:blipFill rotWithShape="1">
-          <a:blip xmlns:r="http://schemas.openxmlformats.org/officeDocument/2006/relationships" xmlns:a="http://schemas.openxmlformats.org/drawingml/2006/main" r:embed="R85489ee3c8974496">
+          <a:blip xmlns:r="http://schemas.openxmlformats.org/officeDocument/2006/relationships" xmlns:a="http://schemas.openxmlformats.org/drawingml/2006/main" r:embed="Rcb459e903b544436">
             <a:alphaModFix amt="28000"/>
           </a:blip>
           <a:stretch xmlns:a="http://schemas.openxmlformats.org/drawingml/2006/main"/>
@@ -2451,7 +2451,7 @@
           <p:nvPr/>
         </p:nvPicPr>
         <p:blipFill rotWithShape="1">
-          <a:blip xmlns:r="http://schemas.openxmlformats.org/officeDocument/2006/relationships" xmlns:a="http://schemas.openxmlformats.org/drawingml/2006/main" r:embed="R9b130daa87154ca1">
+          <a:blip xmlns:r="http://schemas.openxmlformats.org/officeDocument/2006/relationships" xmlns:a="http://schemas.openxmlformats.org/drawingml/2006/main" r:embed="R212fe91d178f4af4">
             <a:alphaModFix amt="28000"/>
           </a:blip>
           <a:stretch xmlns:a="http://schemas.openxmlformats.org/drawingml/2006/main"/>
@@ -2875,7 +2875,7 @@
           <p:nvPr/>
         </p:nvPicPr>
         <p:blipFill rotWithShape="1">
-          <a:blip xmlns:r="http://schemas.openxmlformats.org/officeDocument/2006/relationships" xmlns:a="http://schemas.openxmlformats.org/drawingml/2006/main" r:embed="Rd79b833bb6a94db8">
+          <a:blip xmlns:r="http://schemas.openxmlformats.org/officeDocument/2006/relationships" xmlns:a="http://schemas.openxmlformats.org/drawingml/2006/main" r:embed="R9595fabf26eb4b49">
             <a:alphaModFix amt="28000"/>
           </a:blip>
           <a:stretch xmlns:a="http://schemas.openxmlformats.org/drawingml/2006/main"/>
@@ -3016,7 +3016,7 @@
           <p:nvPr/>
         </p:nvPicPr>
         <p:blipFill rotWithShape="1">
-          <a:blip xmlns:r="http://schemas.openxmlformats.org/officeDocument/2006/relationships" xmlns:a="http://schemas.openxmlformats.org/drawingml/2006/main" r:embed="Rf4c0870a8d3f4c24">
+          <a:blip xmlns:r="http://schemas.openxmlformats.org/officeDocument/2006/relationships" xmlns:a="http://schemas.openxmlformats.org/drawingml/2006/main" r:embed="Rf137e769ad034643">
             <a:alphaModFix amt="28000"/>
           </a:blip>
           <a:stretch xmlns:a="http://schemas.openxmlformats.org/drawingml/2006/main"/>
@@ -3130,7 +3130,7 @@
           <p:nvPr/>
         </p:nvPicPr>
         <p:blipFill rotWithShape="1">
-          <a:blip xmlns:r="http://schemas.openxmlformats.org/officeDocument/2006/relationships" xmlns:a="http://schemas.openxmlformats.org/drawingml/2006/main" r:embed="Re9037e0474cd4258">
+          <a:blip xmlns:r="http://schemas.openxmlformats.org/officeDocument/2006/relationships" xmlns:a="http://schemas.openxmlformats.org/drawingml/2006/main" r:embed="R063d8682f6fe48ae">
             <a:alphaModFix amt="28000"/>
           </a:blip>
           <a:stretch xmlns:a="http://schemas.openxmlformats.org/drawingml/2006/main"/>
@@ -3457,7 +3457,7 @@
           <p:nvPr/>
         </p:nvPicPr>
         <p:blipFill rotWithShape="1">
-          <a:blip xmlns:r="http://schemas.openxmlformats.org/officeDocument/2006/relationships" xmlns:a="http://schemas.openxmlformats.org/drawingml/2006/main" r:embed="Ra9211aa213f54217">
+          <a:blip xmlns:r="http://schemas.openxmlformats.org/officeDocument/2006/relationships" xmlns:a="http://schemas.openxmlformats.org/drawingml/2006/main" r:embed="R230c31c0284e4ea0">
             <a:alphaModFix amt="28000"/>
           </a:blip>
           <a:stretch xmlns:a="http://schemas.openxmlformats.org/drawingml/2006/main"/>
@@ -3745,7 +3745,7 @@
           <p:nvPr/>
         </p:nvPicPr>
         <p:blipFill rotWithShape="1">
-          <a:blip xmlns:r="http://schemas.openxmlformats.org/officeDocument/2006/relationships" xmlns:a="http://schemas.openxmlformats.org/drawingml/2006/main" r:embed="Rb8185aeeaa274ea9">
+          <a:blip xmlns:r="http://schemas.openxmlformats.org/officeDocument/2006/relationships" xmlns:a="http://schemas.openxmlformats.org/drawingml/2006/main" r:embed="R882e965f3d6d4735">
             <a:alphaModFix amt="28000"/>
           </a:blip>
           <a:stretch xmlns:a="http://schemas.openxmlformats.org/drawingml/2006/main"/>
@@ -3982,17 +3982,17 @@
   </p:cSld>
   <p:clrMap bg1="lt1" tx1="dk1" bg2="lt2" tx2="dk2" accent1="accent1" accent2="accent2" accent3="accent3" accent4="accent4" accent5="accent5" accent6="accent6" hlink="hlink" folHlink="folHlink"/>
   <p:sldLayoutIdLst>
-    <p:sldLayoutId xmlns:r="http://schemas.openxmlformats.org/officeDocument/2006/relationships" id="2147483649" r:id="R315b33c09a814440"/>
-    <p:sldLayoutId xmlns:r="http://schemas.openxmlformats.org/officeDocument/2006/relationships" id="2147483650" r:id="R8c2d1bde15f24db2"/>
-    <p:sldLayoutId xmlns:r="http://schemas.openxmlformats.org/officeDocument/2006/relationships" id="2147483651" r:id="Rbd48d04a20404118"/>
-    <p:sldLayoutId xmlns:r="http://schemas.openxmlformats.org/officeDocument/2006/relationships" id="2147483652" r:id="Rb40f4d3a693b4ec6"/>
-    <p:sldLayoutId xmlns:r="http://schemas.openxmlformats.org/officeDocument/2006/relationships" id="2147483653" r:id="Rd5319a6bf43e47ae"/>
-    <p:sldLayoutId xmlns:r="http://schemas.openxmlformats.org/officeDocument/2006/relationships" id="2147483654" r:id="Rf4705156dc2c427d"/>
-    <p:sldLayoutId xmlns:r="http://schemas.openxmlformats.org/officeDocument/2006/relationships" id="2147483655" r:id="Rd95fed3ff56348cc"/>
-    <p:sldLayoutId xmlns:r="http://schemas.openxmlformats.org/officeDocument/2006/relationships" id="2147483656" r:id="Rc428819ba9b043b5"/>
-    <p:sldLayoutId xmlns:r="http://schemas.openxmlformats.org/officeDocument/2006/relationships" id="2147483657" r:id="R546dc27eb1214010"/>
-    <p:sldLayoutId xmlns:r="http://schemas.openxmlformats.org/officeDocument/2006/relationships" id="2147483658" r:id="R413b3e51106d4ba0"/>
-    <p:sldLayoutId xmlns:r="http://schemas.openxmlformats.org/officeDocument/2006/relationships" id="2147483659" r:id="Redf44161854f4c93"/>
+    <p:sldLayoutId xmlns:r="http://schemas.openxmlformats.org/officeDocument/2006/relationships" id="2147483649" r:id="R0160325ceb13444a"/>
+    <p:sldLayoutId xmlns:r="http://schemas.openxmlformats.org/officeDocument/2006/relationships" id="2147483650" r:id="R3884348361c74c91"/>
+    <p:sldLayoutId xmlns:r="http://schemas.openxmlformats.org/officeDocument/2006/relationships" id="2147483651" r:id="Rf6f7fc170ea3416e"/>
+    <p:sldLayoutId xmlns:r="http://schemas.openxmlformats.org/officeDocument/2006/relationships" id="2147483652" r:id="Rf917574948674555"/>
+    <p:sldLayoutId xmlns:r="http://schemas.openxmlformats.org/officeDocument/2006/relationships" id="2147483653" r:id="Ra54d83274814431b"/>
+    <p:sldLayoutId xmlns:r="http://schemas.openxmlformats.org/officeDocument/2006/relationships" id="2147483654" r:id="Rf4156303ed84422f"/>
+    <p:sldLayoutId xmlns:r="http://schemas.openxmlformats.org/officeDocument/2006/relationships" id="2147483655" r:id="R5c67631fb0fe4469"/>
+    <p:sldLayoutId xmlns:r="http://schemas.openxmlformats.org/officeDocument/2006/relationships" id="2147483656" r:id="Rfb9ebec2c95d49ce"/>
+    <p:sldLayoutId xmlns:r="http://schemas.openxmlformats.org/officeDocument/2006/relationships" id="2147483657" r:id="R2d394599ca6a49dc"/>
+    <p:sldLayoutId xmlns:r="http://schemas.openxmlformats.org/officeDocument/2006/relationships" id="2147483658" r:id="Re8b4c0dc910d4f7c"/>
+    <p:sldLayoutId xmlns:r="http://schemas.openxmlformats.org/officeDocument/2006/relationships" id="2147483659" r:id="R007208d90e094099"/>
   </p:sldLayoutIdLst>
   <p:hf hdr="0" ftr="0" dt="0"/>
   <p:txStyles>

--- a/Mapped Curriculum Lessons/Grade 7/Lesson 15 - Joining Text/Joining Text - Slides.pptx
+++ b/Mapped Curriculum Lessons/Grade 7/Lesson 15 - Joining Text/Joining Text - Slides.pptx
@@ -2,28 +2,28 @@
 <file path=ppt/presentation.xml><?xml version="1.0" encoding="utf-8"?>
 <p:presentation xmlns:p="http://schemas.openxmlformats.org/presentationml/2006/main" embedTrueTypeFonts="1" saveSubsetFonts="0">
   <p:sldMasterIdLst>
-    <p:sldMasterId xmlns:r="http://schemas.openxmlformats.org/officeDocument/2006/relationships" id="2147483648" r:id="Rc6b7717fe74246e6"/>
+    <p:sldMasterId xmlns:r="http://schemas.openxmlformats.org/officeDocument/2006/relationships" id="2147483648" r:id="Rb142e23c6a5b469f"/>
   </p:sldMasterIdLst>
   <p:notesMasterIdLst>
-    <p:notesMasterId xmlns:r="http://schemas.openxmlformats.org/officeDocument/2006/relationships" r:id="Reca75bfd523b4376"/>
+    <p:notesMasterId xmlns:r="http://schemas.openxmlformats.org/officeDocument/2006/relationships" r:id="R5f36284031de4d2a"/>
   </p:notesMasterIdLst>
   <p:sldIdLst>
-    <p:sldId xmlns:r="http://schemas.openxmlformats.org/officeDocument/2006/relationships" id="256" r:id="R83c10156f26f46df"/>
-    <p:sldId xmlns:r="http://schemas.openxmlformats.org/officeDocument/2006/relationships" id="257" r:id="Ra6a282f961f547dc"/>
-    <p:sldId xmlns:r="http://schemas.openxmlformats.org/officeDocument/2006/relationships" id="258" r:id="R70d308eda5e54bb6"/>
-    <p:sldId xmlns:r="http://schemas.openxmlformats.org/officeDocument/2006/relationships" id="259" r:id="R4f6ff537ec644052"/>
-    <p:sldId xmlns:r="http://schemas.openxmlformats.org/officeDocument/2006/relationships" id="260" r:id="Rf76b76b584f84a9b"/>
-    <p:sldId xmlns:r="http://schemas.openxmlformats.org/officeDocument/2006/relationships" id="261" r:id="R91c98bd9e7ac4217"/>
-    <p:sldId xmlns:r="http://schemas.openxmlformats.org/officeDocument/2006/relationships" id="262" r:id="R39bad3abb5fc4d83"/>
-    <p:sldId xmlns:r="http://schemas.openxmlformats.org/officeDocument/2006/relationships" id="263" r:id="Ra8f1162346c14e17"/>
-    <p:sldId xmlns:r="http://schemas.openxmlformats.org/officeDocument/2006/relationships" id="264" r:id="R10e23a66e0cd4cff"/>
+    <p:sldId xmlns:r="http://schemas.openxmlformats.org/officeDocument/2006/relationships" id="256" r:id="Rc25ce493c8bf46e4"/>
+    <p:sldId xmlns:r="http://schemas.openxmlformats.org/officeDocument/2006/relationships" id="257" r:id="Red58c5209a994eff"/>
+    <p:sldId xmlns:r="http://schemas.openxmlformats.org/officeDocument/2006/relationships" id="258" r:id="R80d806f561294f0d"/>
+    <p:sldId xmlns:r="http://schemas.openxmlformats.org/officeDocument/2006/relationships" id="259" r:id="Rc27c2db329ce4508"/>
+    <p:sldId xmlns:r="http://schemas.openxmlformats.org/officeDocument/2006/relationships" id="260" r:id="R844a8cc7d8594fe3"/>
+    <p:sldId xmlns:r="http://schemas.openxmlformats.org/officeDocument/2006/relationships" id="261" r:id="R05834e5ff47a46a3"/>
+    <p:sldId xmlns:r="http://schemas.openxmlformats.org/officeDocument/2006/relationships" id="262" r:id="Rf8eb580a27e9468c"/>
+    <p:sldId xmlns:r="http://schemas.openxmlformats.org/officeDocument/2006/relationships" id="263" r:id="R429ec5b1a0434df3"/>
+    <p:sldId xmlns:r="http://schemas.openxmlformats.org/officeDocument/2006/relationships" id="264" r:id="R6746b3a6bde64a53"/>
   </p:sldIdLst>
   <p:sldSz cx="12192000" cy="6858000"/>
   <p:notesSz cx="6858000" cy="9144000"/>
   <p:embeddedFontLst>
     <p:embeddedFont>
       <p:font typeface="JetBrains Mono"/>
-      <p:regular xmlns:r="http://schemas.openxmlformats.org/officeDocument/2006/relationships" r:id="R6faa8a797620493a"/>
+      <p:regular xmlns:r="http://schemas.openxmlformats.org/officeDocument/2006/relationships" r:id="R286713eeb6ca49c2"/>
     </p:embeddedFont>
   </p:embeddedFontLst>
 </p:presentation>
@@ -1071,7 +1071,7 @@
           <p:nvPr/>
         </p:nvPicPr>
         <p:blipFill rotWithShape="1">
-          <a:blip xmlns:r="http://schemas.openxmlformats.org/officeDocument/2006/relationships" xmlns:a="http://schemas.openxmlformats.org/drawingml/2006/main" r:embed="R77b748e32b3946ef"/>
+          <a:blip xmlns:r="http://schemas.openxmlformats.org/officeDocument/2006/relationships" xmlns:a="http://schemas.openxmlformats.org/drawingml/2006/main" r:embed="Raa26199cb8e24918"/>
           <a:stretch xmlns:a="http://schemas.openxmlformats.org/drawingml/2006/main"/>
         </p:blipFill>
         <p:spPr>
@@ -1451,7 +1451,7 @@
           <p:nvPr/>
         </p:nvPicPr>
         <p:blipFill rotWithShape="1">
-          <a:blip xmlns:r="http://schemas.openxmlformats.org/officeDocument/2006/relationships" xmlns:a="http://schemas.openxmlformats.org/drawingml/2006/main" r:embed="R3fb8fee914fb4ce5">
+          <a:blip xmlns:r="http://schemas.openxmlformats.org/officeDocument/2006/relationships" xmlns:a="http://schemas.openxmlformats.org/drawingml/2006/main" r:embed="R232e0eb0dd144447">
             <a:alphaModFix amt="28000"/>
           </a:blip>
           <a:stretch xmlns:a="http://schemas.openxmlformats.org/drawingml/2006/main"/>
@@ -1664,7 +1664,7 @@
           <p:nvPr/>
         </p:nvPicPr>
         <p:blipFill rotWithShape="1">
-          <a:blip xmlns:r="http://schemas.openxmlformats.org/officeDocument/2006/relationships" xmlns:a="http://schemas.openxmlformats.org/drawingml/2006/main" r:embed="R71f062e247da4710">
+          <a:blip xmlns:r="http://schemas.openxmlformats.org/officeDocument/2006/relationships" xmlns:a="http://schemas.openxmlformats.org/drawingml/2006/main" r:embed="R1a00a27d5ba544c5">
             <a:alphaModFix amt="28000"/>
           </a:blip>
           <a:stretch xmlns:a="http://schemas.openxmlformats.org/drawingml/2006/main"/>
@@ -1899,7 +1899,7 @@
           <p:nvPr/>
         </p:nvPicPr>
         <p:blipFill rotWithShape="1">
-          <a:blip xmlns:r="http://schemas.openxmlformats.org/officeDocument/2006/relationships" xmlns:a="http://schemas.openxmlformats.org/drawingml/2006/main" r:embed="R8e3d4ac238344996">
+          <a:blip xmlns:r="http://schemas.openxmlformats.org/officeDocument/2006/relationships" xmlns:a="http://schemas.openxmlformats.org/drawingml/2006/main" r:embed="Rcb6283a9bd7f4dcd">
             <a:alphaModFix amt="28000"/>
           </a:blip>
           <a:stretch xmlns:a="http://schemas.openxmlformats.org/drawingml/2006/main"/>
@@ -2176,7 +2176,7 @@
           <p:nvPr/>
         </p:nvPicPr>
         <p:blipFill rotWithShape="1">
-          <a:blip xmlns:r="http://schemas.openxmlformats.org/officeDocument/2006/relationships" xmlns:a="http://schemas.openxmlformats.org/drawingml/2006/main" r:embed="Rcb459e903b544436">
+          <a:blip xmlns:r="http://schemas.openxmlformats.org/officeDocument/2006/relationships" xmlns:a="http://schemas.openxmlformats.org/drawingml/2006/main" r:embed="Raa7e03dfadef4580">
             <a:alphaModFix amt="28000"/>
           </a:blip>
           <a:stretch xmlns:a="http://schemas.openxmlformats.org/drawingml/2006/main"/>
@@ -2451,7 +2451,7 @@
           <p:nvPr/>
         </p:nvPicPr>
         <p:blipFill rotWithShape="1">
-          <a:blip xmlns:r="http://schemas.openxmlformats.org/officeDocument/2006/relationships" xmlns:a="http://schemas.openxmlformats.org/drawingml/2006/main" r:embed="R212fe91d178f4af4">
+          <a:blip xmlns:r="http://schemas.openxmlformats.org/officeDocument/2006/relationships" xmlns:a="http://schemas.openxmlformats.org/drawingml/2006/main" r:embed="R17ae179c9bfa4cb6">
             <a:alphaModFix amt="28000"/>
           </a:blip>
           <a:stretch xmlns:a="http://schemas.openxmlformats.org/drawingml/2006/main"/>
@@ -2875,7 +2875,7 @@
           <p:nvPr/>
         </p:nvPicPr>
         <p:blipFill rotWithShape="1">
-          <a:blip xmlns:r="http://schemas.openxmlformats.org/officeDocument/2006/relationships" xmlns:a="http://schemas.openxmlformats.org/drawingml/2006/main" r:embed="R9595fabf26eb4b49">
+          <a:blip xmlns:r="http://schemas.openxmlformats.org/officeDocument/2006/relationships" xmlns:a="http://schemas.openxmlformats.org/drawingml/2006/main" r:embed="R65bd1df7951d4fb8">
             <a:alphaModFix amt="28000"/>
           </a:blip>
           <a:stretch xmlns:a="http://schemas.openxmlformats.org/drawingml/2006/main"/>
@@ -3016,7 +3016,7 @@
           <p:nvPr/>
         </p:nvPicPr>
         <p:blipFill rotWithShape="1">
-          <a:blip xmlns:r="http://schemas.openxmlformats.org/officeDocument/2006/relationships" xmlns:a="http://schemas.openxmlformats.org/drawingml/2006/main" r:embed="Rf137e769ad034643">
+          <a:blip xmlns:r="http://schemas.openxmlformats.org/officeDocument/2006/relationships" xmlns:a="http://schemas.openxmlformats.org/drawingml/2006/main" r:embed="R0b05b4c5885a4453">
             <a:alphaModFix amt="28000"/>
           </a:blip>
           <a:stretch xmlns:a="http://schemas.openxmlformats.org/drawingml/2006/main"/>
@@ -3130,7 +3130,7 @@
           <p:nvPr/>
         </p:nvPicPr>
         <p:blipFill rotWithShape="1">
-          <a:blip xmlns:r="http://schemas.openxmlformats.org/officeDocument/2006/relationships" xmlns:a="http://schemas.openxmlformats.org/drawingml/2006/main" r:embed="R063d8682f6fe48ae">
+          <a:blip xmlns:r="http://schemas.openxmlformats.org/officeDocument/2006/relationships" xmlns:a="http://schemas.openxmlformats.org/drawingml/2006/main" r:embed="Rdba66ce6114b4678">
             <a:alphaModFix amt="28000"/>
           </a:blip>
           <a:stretch xmlns:a="http://schemas.openxmlformats.org/drawingml/2006/main"/>
@@ -3457,7 +3457,7 @@
           <p:nvPr/>
         </p:nvPicPr>
         <p:blipFill rotWithShape="1">
-          <a:blip xmlns:r="http://schemas.openxmlformats.org/officeDocument/2006/relationships" xmlns:a="http://schemas.openxmlformats.org/drawingml/2006/main" r:embed="R230c31c0284e4ea0">
+          <a:blip xmlns:r="http://schemas.openxmlformats.org/officeDocument/2006/relationships" xmlns:a="http://schemas.openxmlformats.org/drawingml/2006/main" r:embed="R6b2bee5f4c7a43a2">
             <a:alphaModFix amt="28000"/>
           </a:blip>
           <a:stretch xmlns:a="http://schemas.openxmlformats.org/drawingml/2006/main"/>
@@ -3745,7 +3745,7 @@
           <p:nvPr/>
         </p:nvPicPr>
         <p:blipFill rotWithShape="1">
-          <a:blip xmlns:r="http://schemas.openxmlformats.org/officeDocument/2006/relationships" xmlns:a="http://schemas.openxmlformats.org/drawingml/2006/main" r:embed="R882e965f3d6d4735">
+          <a:blip xmlns:r="http://schemas.openxmlformats.org/officeDocument/2006/relationships" xmlns:a="http://schemas.openxmlformats.org/drawingml/2006/main" r:embed="Rc725a66dc2924cd4">
             <a:alphaModFix amt="28000"/>
           </a:blip>
           <a:stretch xmlns:a="http://schemas.openxmlformats.org/drawingml/2006/main"/>
@@ -3982,17 +3982,17 @@
   </p:cSld>
   <p:clrMap bg1="lt1" tx1="dk1" bg2="lt2" tx2="dk2" accent1="accent1" accent2="accent2" accent3="accent3" accent4="accent4" accent5="accent5" accent6="accent6" hlink="hlink" folHlink="folHlink"/>
   <p:sldLayoutIdLst>
-    <p:sldLayoutId xmlns:r="http://schemas.openxmlformats.org/officeDocument/2006/relationships" id="2147483649" r:id="R0160325ceb13444a"/>
-    <p:sldLayoutId xmlns:r="http://schemas.openxmlformats.org/officeDocument/2006/relationships" id="2147483650" r:id="R3884348361c74c91"/>
-    <p:sldLayoutId xmlns:r="http://schemas.openxmlformats.org/officeDocument/2006/relationships" id="2147483651" r:id="Rf6f7fc170ea3416e"/>
-    <p:sldLayoutId xmlns:r="http://schemas.openxmlformats.org/officeDocument/2006/relationships" id="2147483652" r:id="Rf917574948674555"/>
-    <p:sldLayoutId xmlns:r="http://schemas.openxmlformats.org/officeDocument/2006/relationships" id="2147483653" r:id="Ra54d83274814431b"/>
-    <p:sldLayoutId xmlns:r="http://schemas.openxmlformats.org/officeDocument/2006/relationships" id="2147483654" r:id="Rf4156303ed84422f"/>
-    <p:sldLayoutId xmlns:r="http://schemas.openxmlformats.org/officeDocument/2006/relationships" id="2147483655" r:id="R5c67631fb0fe4469"/>
-    <p:sldLayoutId xmlns:r="http://schemas.openxmlformats.org/officeDocument/2006/relationships" id="2147483656" r:id="Rfb9ebec2c95d49ce"/>
-    <p:sldLayoutId xmlns:r="http://schemas.openxmlformats.org/officeDocument/2006/relationships" id="2147483657" r:id="R2d394599ca6a49dc"/>
-    <p:sldLayoutId xmlns:r="http://schemas.openxmlformats.org/officeDocument/2006/relationships" id="2147483658" r:id="Re8b4c0dc910d4f7c"/>
-    <p:sldLayoutId xmlns:r="http://schemas.openxmlformats.org/officeDocument/2006/relationships" id="2147483659" r:id="R007208d90e094099"/>
+    <p:sldLayoutId xmlns:r="http://schemas.openxmlformats.org/officeDocument/2006/relationships" id="2147483649" r:id="R855c7a0138cf4464"/>
+    <p:sldLayoutId xmlns:r="http://schemas.openxmlformats.org/officeDocument/2006/relationships" id="2147483650" r:id="Rf5f68b63fbe74769"/>
+    <p:sldLayoutId xmlns:r="http://schemas.openxmlformats.org/officeDocument/2006/relationships" id="2147483651" r:id="Rdf5aef25beff449f"/>
+    <p:sldLayoutId xmlns:r="http://schemas.openxmlformats.org/officeDocument/2006/relationships" id="2147483652" r:id="R23f916ea57ea4325"/>
+    <p:sldLayoutId xmlns:r="http://schemas.openxmlformats.org/officeDocument/2006/relationships" id="2147483653" r:id="Rce96533541c745f3"/>
+    <p:sldLayoutId xmlns:r="http://schemas.openxmlformats.org/officeDocument/2006/relationships" id="2147483654" r:id="R899a5d61e1834633"/>
+    <p:sldLayoutId xmlns:r="http://schemas.openxmlformats.org/officeDocument/2006/relationships" id="2147483655" r:id="Raeaf7346803642ce"/>
+    <p:sldLayoutId xmlns:r="http://schemas.openxmlformats.org/officeDocument/2006/relationships" id="2147483656" r:id="Rb5a64da378b544ca"/>
+    <p:sldLayoutId xmlns:r="http://schemas.openxmlformats.org/officeDocument/2006/relationships" id="2147483657" r:id="R86404c79b82a4683"/>
+    <p:sldLayoutId xmlns:r="http://schemas.openxmlformats.org/officeDocument/2006/relationships" id="2147483658" r:id="R8efb04b004b64e54"/>
+    <p:sldLayoutId xmlns:r="http://schemas.openxmlformats.org/officeDocument/2006/relationships" id="2147483659" r:id="R560687721e47440c"/>
   </p:sldLayoutIdLst>
   <p:hf hdr="0" ftr="0" dt="0"/>
   <p:txStyles>

--- a/Mapped Curriculum Lessons/Grade 7/Lesson 15 - Joining Text/Joining Text - Slides.pptx
+++ b/Mapped Curriculum Lessons/Grade 7/Lesson 15 - Joining Text/Joining Text - Slides.pptx
@@ -2,28 +2,28 @@
 <file path=ppt/presentation.xml><?xml version="1.0" encoding="utf-8"?>
 <p:presentation xmlns:p="http://schemas.openxmlformats.org/presentationml/2006/main" embedTrueTypeFonts="1" saveSubsetFonts="0">
   <p:sldMasterIdLst>
-    <p:sldMasterId xmlns:r="http://schemas.openxmlformats.org/officeDocument/2006/relationships" id="2147483648" r:id="Rb142e23c6a5b469f"/>
+    <p:sldMasterId xmlns:r="http://schemas.openxmlformats.org/officeDocument/2006/relationships" id="2147483648" r:id="R2b1116f4916e46d0"/>
   </p:sldMasterIdLst>
   <p:notesMasterIdLst>
-    <p:notesMasterId xmlns:r="http://schemas.openxmlformats.org/officeDocument/2006/relationships" r:id="R5f36284031de4d2a"/>
+    <p:notesMasterId xmlns:r="http://schemas.openxmlformats.org/officeDocument/2006/relationships" r:id="R1f3e58c210954aab"/>
   </p:notesMasterIdLst>
   <p:sldIdLst>
-    <p:sldId xmlns:r="http://schemas.openxmlformats.org/officeDocument/2006/relationships" id="256" r:id="Rc25ce493c8bf46e4"/>
-    <p:sldId xmlns:r="http://schemas.openxmlformats.org/officeDocument/2006/relationships" id="257" r:id="Red58c5209a994eff"/>
-    <p:sldId xmlns:r="http://schemas.openxmlformats.org/officeDocument/2006/relationships" id="258" r:id="R80d806f561294f0d"/>
-    <p:sldId xmlns:r="http://schemas.openxmlformats.org/officeDocument/2006/relationships" id="259" r:id="Rc27c2db329ce4508"/>
-    <p:sldId xmlns:r="http://schemas.openxmlformats.org/officeDocument/2006/relationships" id="260" r:id="R844a8cc7d8594fe3"/>
-    <p:sldId xmlns:r="http://schemas.openxmlformats.org/officeDocument/2006/relationships" id="261" r:id="R05834e5ff47a46a3"/>
-    <p:sldId xmlns:r="http://schemas.openxmlformats.org/officeDocument/2006/relationships" id="262" r:id="Rf8eb580a27e9468c"/>
-    <p:sldId xmlns:r="http://schemas.openxmlformats.org/officeDocument/2006/relationships" id="263" r:id="R429ec5b1a0434df3"/>
-    <p:sldId xmlns:r="http://schemas.openxmlformats.org/officeDocument/2006/relationships" id="264" r:id="R6746b3a6bde64a53"/>
+    <p:sldId xmlns:r="http://schemas.openxmlformats.org/officeDocument/2006/relationships" id="256" r:id="R321bca10a83547f3"/>
+    <p:sldId xmlns:r="http://schemas.openxmlformats.org/officeDocument/2006/relationships" id="257" r:id="R920780a7b35d43ad"/>
+    <p:sldId xmlns:r="http://schemas.openxmlformats.org/officeDocument/2006/relationships" id="258" r:id="Rc3a0a41ea5d94503"/>
+    <p:sldId xmlns:r="http://schemas.openxmlformats.org/officeDocument/2006/relationships" id="259" r:id="R515fb92ee9b6494c"/>
+    <p:sldId xmlns:r="http://schemas.openxmlformats.org/officeDocument/2006/relationships" id="260" r:id="R28fe13086a9e406f"/>
+    <p:sldId xmlns:r="http://schemas.openxmlformats.org/officeDocument/2006/relationships" id="261" r:id="R45da60be0b13431d"/>
+    <p:sldId xmlns:r="http://schemas.openxmlformats.org/officeDocument/2006/relationships" id="262" r:id="R2025193b9a024891"/>
+    <p:sldId xmlns:r="http://schemas.openxmlformats.org/officeDocument/2006/relationships" id="263" r:id="Rfa71ee7d44da4e9a"/>
+    <p:sldId xmlns:r="http://schemas.openxmlformats.org/officeDocument/2006/relationships" id="264" r:id="R58e288d52361477e"/>
   </p:sldIdLst>
   <p:sldSz cx="12192000" cy="6858000"/>
   <p:notesSz cx="6858000" cy="9144000"/>
   <p:embeddedFontLst>
     <p:embeddedFont>
       <p:font typeface="JetBrains Mono"/>
-      <p:regular xmlns:r="http://schemas.openxmlformats.org/officeDocument/2006/relationships" r:id="R286713eeb6ca49c2"/>
+      <p:regular xmlns:r="http://schemas.openxmlformats.org/officeDocument/2006/relationships" r:id="R7e3748b2eb0e4ccc"/>
     </p:embeddedFont>
   </p:embeddedFontLst>
 </p:presentation>
@@ -1071,7 +1071,7 @@
           <p:nvPr/>
         </p:nvPicPr>
         <p:blipFill rotWithShape="1">
-          <a:blip xmlns:r="http://schemas.openxmlformats.org/officeDocument/2006/relationships" xmlns:a="http://schemas.openxmlformats.org/drawingml/2006/main" r:embed="Raa26199cb8e24918"/>
+          <a:blip xmlns:r="http://schemas.openxmlformats.org/officeDocument/2006/relationships" xmlns:a="http://schemas.openxmlformats.org/drawingml/2006/main" r:embed="R63aa6a3567b94b6c"/>
           <a:stretch xmlns:a="http://schemas.openxmlformats.org/drawingml/2006/main"/>
         </p:blipFill>
         <p:spPr>
@@ -1451,7 +1451,7 @@
           <p:nvPr/>
         </p:nvPicPr>
         <p:blipFill rotWithShape="1">
-          <a:blip xmlns:r="http://schemas.openxmlformats.org/officeDocument/2006/relationships" xmlns:a="http://schemas.openxmlformats.org/drawingml/2006/main" r:embed="R232e0eb0dd144447">
+          <a:blip xmlns:r="http://schemas.openxmlformats.org/officeDocument/2006/relationships" xmlns:a="http://schemas.openxmlformats.org/drawingml/2006/main" r:embed="R4cd0e1e7a0774be3">
             <a:alphaModFix amt="28000"/>
           </a:blip>
           <a:stretch xmlns:a="http://schemas.openxmlformats.org/drawingml/2006/main"/>
@@ -1664,7 +1664,7 @@
           <p:nvPr/>
         </p:nvPicPr>
         <p:blipFill rotWithShape="1">
-          <a:blip xmlns:r="http://schemas.openxmlformats.org/officeDocument/2006/relationships" xmlns:a="http://schemas.openxmlformats.org/drawingml/2006/main" r:embed="R1a00a27d5ba544c5">
+          <a:blip xmlns:r="http://schemas.openxmlformats.org/officeDocument/2006/relationships" xmlns:a="http://schemas.openxmlformats.org/drawingml/2006/main" r:embed="R0d580586482b4d6a">
             <a:alphaModFix amt="28000"/>
           </a:blip>
           <a:stretch xmlns:a="http://schemas.openxmlformats.org/drawingml/2006/main"/>
@@ -1899,7 +1899,7 @@
           <p:nvPr/>
         </p:nvPicPr>
         <p:blipFill rotWithShape="1">
-          <a:blip xmlns:r="http://schemas.openxmlformats.org/officeDocument/2006/relationships" xmlns:a="http://schemas.openxmlformats.org/drawingml/2006/main" r:embed="Rcb6283a9bd7f4dcd">
+          <a:blip xmlns:r="http://schemas.openxmlformats.org/officeDocument/2006/relationships" xmlns:a="http://schemas.openxmlformats.org/drawingml/2006/main" r:embed="R00fa2b26fc094023">
             <a:alphaModFix amt="28000"/>
           </a:blip>
           <a:stretch xmlns:a="http://schemas.openxmlformats.org/drawingml/2006/main"/>
@@ -2176,7 +2176,7 @@
           <p:nvPr/>
         </p:nvPicPr>
         <p:blipFill rotWithShape="1">
-          <a:blip xmlns:r="http://schemas.openxmlformats.org/officeDocument/2006/relationships" xmlns:a="http://schemas.openxmlformats.org/drawingml/2006/main" r:embed="Raa7e03dfadef4580">
+          <a:blip xmlns:r="http://schemas.openxmlformats.org/officeDocument/2006/relationships" xmlns:a="http://schemas.openxmlformats.org/drawingml/2006/main" r:embed="R7d5837e6e28348ed">
             <a:alphaModFix amt="28000"/>
           </a:blip>
           <a:stretch xmlns:a="http://schemas.openxmlformats.org/drawingml/2006/main"/>
@@ -2451,7 +2451,7 @@
           <p:nvPr/>
         </p:nvPicPr>
         <p:blipFill rotWithShape="1">
-          <a:blip xmlns:r="http://schemas.openxmlformats.org/officeDocument/2006/relationships" xmlns:a="http://schemas.openxmlformats.org/drawingml/2006/main" r:embed="R17ae179c9bfa4cb6">
+          <a:blip xmlns:r="http://schemas.openxmlformats.org/officeDocument/2006/relationships" xmlns:a="http://schemas.openxmlformats.org/drawingml/2006/main" r:embed="Rcf3c964e12174caa">
             <a:alphaModFix amt="28000"/>
           </a:blip>
           <a:stretch xmlns:a="http://schemas.openxmlformats.org/drawingml/2006/main"/>
@@ -2875,7 +2875,7 @@
           <p:nvPr/>
         </p:nvPicPr>
         <p:blipFill rotWithShape="1">
-          <a:blip xmlns:r="http://schemas.openxmlformats.org/officeDocument/2006/relationships" xmlns:a="http://schemas.openxmlformats.org/drawingml/2006/main" r:embed="R65bd1df7951d4fb8">
+          <a:blip xmlns:r="http://schemas.openxmlformats.org/officeDocument/2006/relationships" xmlns:a="http://schemas.openxmlformats.org/drawingml/2006/main" r:embed="Rd7229a0ef1c0476a">
             <a:alphaModFix amt="28000"/>
           </a:blip>
           <a:stretch xmlns:a="http://schemas.openxmlformats.org/drawingml/2006/main"/>
@@ -3016,7 +3016,7 @@
           <p:nvPr/>
         </p:nvPicPr>
         <p:blipFill rotWithShape="1">
-          <a:blip xmlns:r="http://schemas.openxmlformats.org/officeDocument/2006/relationships" xmlns:a="http://schemas.openxmlformats.org/drawingml/2006/main" r:embed="R0b05b4c5885a4453">
+          <a:blip xmlns:r="http://schemas.openxmlformats.org/officeDocument/2006/relationships" xmlns:a="http://schemas.openxmlformats.org/drawingml/2006/main" r:embed="R406bdcc78b154361">
             <a:alphaModFix amt="28000"/>
           </a:blip>
           <a:stretch xmlns:a="http://schemas.openxmlformats.org/drawingml/2006/main"/>
@@ -3130,7 +3130,7 @@
           <p:nvPr/>
         </p:nvPicPr>
         <p:blipFill rotWithShape="1">
-          <a:blip xmlns:r="http://schemas.openxmlformats.org/officeDocument/2006/relationships" xmlns:a="http://schemas.openxmlformats.org/drawingml/2006/main" r:embed="Rdba66ce6114b4678">
+          <a:blip xmlns:r="http://schemas.openxmlformats.org/officeDocument/2006/relationships" xmlns:a="http://schemas.openxmlformats.org/drawingml/2006/main" r:embed="Racaa0d3f6f4f48ae">
             <a:alphaModFix amt="28000"/>
           </a:blip>
           <a:stretch xmlns:a="http://schemas.openxmlformats.org/drawingml/2006/main"/>
@@ -3457,7 +3457,7 @@
           <p:nvPr/>
         </p:nvPicPr>
         <p:blipFill rotWithShape="1">
-          <a:blip xmlns:r="http://schemas.openxmlformats.org/officeDocument/2006/relationships" xmlns:a="http://schemas.openxmlformats.org/drawingml/2006/main" r:embed="R6b2bee5f4c7a43a2">
+          <a:blip xmlns:r="http://schemas.openxmlformats.org/officeDocument/2006/relationships" xmlns:a="http://schemas.openxmlformats.org/drawingml/2006/main" r:embed="Rdb00fcc9be414c47">
             <a:alphaModFix amt="28000"/>
           </a:blip>
           <a:stretch xmlns:a="http://schemas.openxmlformats.org/drawingml/2006/main"/>
@@ -3745,7 +3745,7 @@
           <p:nvPr/>
         </p:nvPicPr>
         <p:blipFill rotWithShape="1">
-          <a:blip xmlns:r="http://schemas.openxmlformats.org/officeDocument/2006/relationships" xmlns:a="http://schemas.openxmlformats.org/drawingml/2006/main" r:embed="Rc725a66dc2924cd4">
+          <a:blip xmlns:r="http://schemas.openxmlformats.org/officeDocument/2006/relationships" xmlns:a="http://schemas.openxmlformats.org/drawingml/2006/main" r:embed="Rc691679c4d854314">
             <a:alphaModFix amt="28000"/>
           </a:blip>
           <a:stretch xmlns:a="http://schemas.openxmlformats.org/drawingml/2006/main"/>
@@ -3982,17 +3982,17 @@
   </p:cSld>
   <p:clrMap bg1="lt1" tx1="dk1" bg2="lt2" tx2="dk2" accent1="accent1" accent2="accent2" accent3="accent3" accent4="accent4" accent5="accent5" accent6="accent6" hlink="hlink" folHlink="folHlink"/>
   <p:sldLayoutIdLst>
-    <p:sldLayoutId xmlns:r="http://schemas.openxmlformats.org/officeDocument/2006/relationships" id="2147483649" r:id="R855c7a0138cf4464"/>
-    <p:sldLayoutId xmlns:r="http://schemas.openxmlformats.org/officeDocument/2006/relationships" id="2147483650" r:id="Rf5f68b63fbe74769"/>
-    <p:sldLayoutId xmlns:r="http://schemas.openxmlformats.org/officeDocument/2006/relationships" id="2147483651" r:id="Rdf5aef25beff449f"/>
-    <p:sldLayoutId xmlns:r="http://schemas.openxmlformats.org/officeDocument/2006/relationships" id="2147483652" r:id="R23f916ea57ea4325"/>
-    <p:sldLayoutId xmlns:r="http://schemas.openxmlformats.org/officeDocument/2006/relationships" id="2147483653" r:id="Rce96533541c745f3"/>
-    <p:sldLayoutId xmlns:r="http://schemas.openxmlformats.org/officeDocument/2006/relationships" id="2147483654" r:id="R899a5d61e1834633"/>
-    <p:sldLayoutId xmlns:r="http://schemas.openxmlformats.org/officeDocument/2006/relationships" id="2147483655" r:id="Raeaf7346803642ce"/>
-    <p:sldLayoutId xmlns:r="http://schemas.openxmlformats.org/officeDocument/2006/relationships" id="2147483656" r:id="Rb5a64da378b544ca"/>
-    <p:sldLayoutId xmlns:r="http://schemas.openxmlformats.org/officeDocument/2006/relationships" id="2147483657" r:id="R86404c79b82a4683"/>
-    <p:sldLayoutId xmlns:r="http://schemas.openxmlformats.org/officeDocument/2006/relationships" id="2147483658" r:id="R8efb04b004b64e54"/>
-    <p:sldLayoutId xmlns:r="http://schemas.openxmlformats.org/officeDocument/2006/relationships" id="2147483659" r:id="R560687721e47440c"/>
+    <p:sldLayoutId xmlns:r="http://schemas.openxmlformats.org/officeDocument/2006/relationships" id="2147483649" r:id="R2c459a2f5f0745d0"/>
+    <p:sldLayoutId xmlns:r="http://schemas.openxmlformats.org/officeDocument/2006/relationships" id="2147483650" r:id="Raaf2140830c34aab"/>
+    <p:sldLayoutId xmlns:r="http://schemas.openxmlformats.org/officeDocument/2006/relationships" id="2147483651" r:id="R7ed22f596a454737"/>
+    <p:sldLayoutId xmlns:r="http://schemas.openxmlformats.org/officeDocument/2006/relationships" id="2147483652" r:id="R14de262055d8446b"/>
+    <p:sldLayoutId xmlns:r="http://schemas.openxmlformats.org/officeDocument/2006/relationships" id="2147483653" r:id="R4b0f467d217a40b7"/>
+    <p:sldLayoutId xmlns:r="http://schemas.openxmlformats.org/officeDocument/2006/relationships" id="2147483654" r:id="R371382ac1f894999"/>
+    <p:sldLayoutId xmlns:r="http://schemas.openxmlformats.org/officeDocument/2006/relationships" id="2147483655" r:id="R67e38210d73b4a77"/>
+    <p:sldLayoutId xmlns:r="http://schemas.openxmlformats.org/officeDocument/2006/relationships" id="2147483656" r:id="R008afcad47e2457c"/>
+    <p:sldLayoutId xmlns:r="http://schemas.openxmlformats.org/officeDocument/2006/relationships" id="2147483657" r:id="R5f30589259c64284"/>
+    <p:sldLayoutId xmlns:r="http://schemas.openxmlformats.org/officeDocument/2006/relationships" id="2147483658" r:id="Ra6bd52074a824d7a"/>
+    <p:sldLayoutId xmlns:r="http://schemas.openxmlformats.org/officeDocument/2006/relationships" id="2147483659" r:id="R43a0211b13b2483e"/>
   </p:sldLayoutIdLst>
   <p:hf hdr="0" ftr="0" dt="0"/>
   <p:txStyles>
